--- a/docs/wswCR7/软工实践-11-13.pptx
+++ b/docs/wswCR7/软工实践-11-13.pptx
@@ -8,9 +8,10 @@
     <p:sldId id="263" r:id="rId3"/>
     <p:sldId id="256" r:id="rId4"/>
     <p:sldId id="266" r:id="rId5"/>
-    <p:sldId id="257" r:id="rId6"/>
-    <p:sldId id="265" r:id="rId7"/>
-    <p:sldId id="258" r:id="rId8"/>
+    <p:sldId id="267" r:id="rId6"/>
+    <p:sldId id="257" r:id="rId7"/>
+    <p:sldId id="265" r:id="rId8"/>
+    <p:sldId id="258" r:id="rId9"/>
   </p:sldIdLst>
   <p:sldSz cx="12192000" cy="6858000"/>
   <p:notesSz cx="6858000" cy="9144000"/>
@@ -112,7 +113,7 @@
   <p:extLst>
     <p:ext uri="{EFAFB233-063F-42B5-8137-9DF3F51BA10A}">
       <p15:sldGuideLst xmlns:p15="http://schemas.microsoft.com/office/powerpoint/2012/main">
-        <p15:guide id="1" orient="horz" pos="2131" userDrawn="1">
+        <p15:guide id="1" orient="horz" pos="2086" userDrawn="1">
           <p15:clr>
             <a:srgbClr val="A4A3A4"/>
           </p15:clr>
@@ -3085,7 +3086,7 @@
         </p:nvSpPr>
         <p:spPr>
           <a:xfrm>
-            <a:off x="3371215" y="2217420"/>
+            <a:off x="3558540" y="1423670"/>
             <a:ext cx="7204710" cy="1198880"/>
           </a:xfrm>
           <a:prstGeom prst="rect">
@@ -3146,7 +3147,11 @@
             </a:r>
             <a:r>
               <a:rPr lang="zh-CN" altLang="en-US" sz="2400"/>
-              <a:t>基本代码</a:t>
+              <a:t>基本代码并</a:t>
+            </a:r>
+            <a:r>
+              <a:rPr lang="zh-CN" altLang="en-US" sz="2400"/>
+              <a:t>测试</a:t>
             </a:r>
             <a:endParaRPr lang="zh-CN" altLang="en-US" sz="2400"/>
           </a:p>
@@ -3154,14 +3159,14 @@
       </p:sp>
       <p:sp>
         <p:nvSpPr>
-          <p:cNvPr id="5" name="文本框 4"/>
+          <p:cNvPr id="6" name="文本框 5"/>
           <p:cNvSpPr txBox="1"/>
           <p:nvPr/>
         </p:nvSpPr>
         <p:spPr>
           <a:xfrm>
-            <a:off x="4345305" y="1462405"/>
-            <a:ext cx="4064000" cy="583565"/>
+            <a:off x="3644265" y="2794000"/>
+            <a:ext cx="4723765" cy="3046095"/>
           </a:xfrm>
           <a:prstGeom prst="rect">
             <a:avLst/>
@@ -3174,35 +3179,6 @@
           </a:bodyPr>
           <a:p>
             <a:r>
-              <a:rPr lang="zh-CN" altLang="en-US" sz="3200"/>
-              <a:t>吴沈炜</a:t>
-            </a:r>
-            <a:endParaRPr lang="zh-CN" altLang="en-US" sz="3200"/>
-          </a:p>
-        </p:txBody>
-      </p:sp>
-      <p:sp>
-        <p:nvSpPr>
-          <p:cNvPr id="6" name="文本框 5"/>
-          <p:cNvSpPr txBox="1"/>
-          <p:nvPr/>
-        </p:nvSpPr>
-        <p:spPr>
-          <a:xfrm>
-            <a:off x="3456940" y="3587750"/>
-            <a:ext cx="4723765" cy="2676525"/>
-          </a:xfrm>
-          <a:prstGeom prst="rect">
-            <a:avLst/>
-          </a:prstGeom>
-          <a:noFill/>
-        </p:spPr>
-        <p:txBody>
-          <a:bodyPr wrap="square" rtlCol="0">
-            <a:spAutoFit/>
-          </a:bodyPr>
-          <a:p>
-            <a:r>
               <a:rPr lang="zh-CN" altLang="en-US" sz="2400">
                 <a:latin typeface="微软雅黑" panose="020B0503020204020204" charset="-122"/>
                 <a:ea typeface="微软雅黑" panose="020B0503020204020204" charset="-122"/>
@@ -3263,7 +3239,7 @@
             <a:endParaRPr lang="en-US" altLang="zh-CN" sz="2400">
               <a:latin typeface="微软雅黑" panose="020B0503020204020204" charset="-122"/>
               <a:ea typeface="微软雅黑" panose="020B0503020204020204" charset="-122"/>
-              <a:cs typeface="微软雅黑" panose="020B0503020204020204" charset="-122"/>
+              <a:cs typeface="Times New Roman" panose="02020603050405020304" charset="0"/>
               <a:sym typeface="+mn-ea"/>
             </a:endParaRPr>
           </a:p>
@@ -3272,10 +3248,28 @@
               <a:rPr lang="en-US" altLang="zh-CN" sz="2400">
                 <a:latin typeface="微软雅黑" panose="020B0503020204020204" charset="-122"/>
                 <a:ea typeface="微软雅黑" panose="020B0503020204020204" charset="-122"/>
-                <a:cs typeface="微软雅黑" panose="020B0503020204020204" charset="-122"/>
+                <a:cs typeface="Times New Roman" panose="02020603050405020304" charset="0"/>
                 <a:sym typeface="+mn-ea"/>
               </a:rPr>
-              <a:t>3.qwen_flash.yaml</a:t>
+              <a:t>3.</a:t>
+            </a:r>
+            <a:r>
+              <a:rPr lang="en-US" altLang="zh-CN" sz="2400">
+                <a:latin typeface="微软雅黑" panose="020B0503020204020204" charset="-122"/>
+                <a:ea typeface="微软雅黑" panose="020B0503020204020204" charset="-122"/>
+                <a:cs typeface="微软雅黑" panose="020B0503020204020204" charset="-122"/>
+                <a:sym typeface="+mn-ea"/>
+              </a:rPr>
+              <a:t>test_rag_agent_template.</a:t>
+            </a:r>
+            <a:r>
+              <a:rPr lang="en-US" altLang="zh-CN" sz="2400">
+                <a:latin typeface="微软雅黑" panose="020B0503020204020204" charset="-122"/>
+                <a:ea typeface="微软雅黑" panose="020B0503020204020204" charset="-122"/>
+                <a:cs typeface="微软雅黑" panose="020B0503020204020204" charset="-122"/>
+                <a:sym typeface="+mn-ea"/>
+              </a:rPr>
+              <a:t>py</a:t>
             </a:r>
             <a:endParaRPr lang="en-US" altLang="zh-CN" sz="2400">
               <a:latin typeface="微软雅黑" panose="020B0503020204020204" charset="-122"/>
@@ -3292,7 +3286,7 @@
                 <a:cs typeface="微软雅黑" panose="020B0503020204020204" charset="-122"/>
                 <a:sym typeface="+mn-ea"/>
               </a:rPr>
-              <a:t>4.test_qwen_connection.py</a:t>
+              <a:t>4.qwen_flash.yaml</a:t>
             </a:r>
             <a:endParaRPr lang="en-US" altLang="zh-CN" sz="2400">
               <a:latin typeface="微软雅黑" panose="020B0503020204020204" charset="-122"/>
@@ -3309,7 +3303,24 @@
                 <a:cs typeface="微软雅黑" panose="020B0503020204020204" charset="-122"/>
                 <a:sym typeface="+mn-ea"/>
               </a:rPr>
-              <a:t>5.qwen_openai_style_llm.</a:t>
+              <a:t>5.test_qwen_connection.py</a:t>
+            </a:r>
+            <a:endParaRPr lang="en-US" altLang="zh-CN" sz="2400">
+              <a:latin typeface="微软雅黑" panose="020B0503020204020204" charset="-122"/>
+              <a:ea typeface="微软雅黑" panose="020B0503020204020204" charset="-122"/>
+              <a:cs typeface="微软雅黑" panose="020B0503020204020204" charset="-122"/>
+              <a:sym typeface="+mn-ea"/>
+            </a:endParaRPr>
+          </a:p>
+          <a:p>
+            <a:r>
+              <a:rPr lang="en-US" altLang="zh-CN" sz="2400">
+                <a:latin typeface="微软雅黑" panose="020B0503020204020204" charset="-122"/>
+                <a:ea typeface="微软雅黑" panose="020B0503020204020204" charset="-122"/>
+                <a:cs typeface="微软雅黑" panose="020B0503020204020204" charset="-122"/>
+                <a:sym typeface="+mn-ea"/>
+              </a:rPr>
+              <a:t>6.qwen_openai_style_llm.</a:t>
             </a:r>
             <a:r>
               <a:rPr lang="en-US" altLang="zh-CN" sz="2400">
@@ -3396,7 +3407,7 @@
         <p:spPr>
           <a:xfrm>
             <a:off x="0" y="101600"/>
-            <a:ext cx="5381625" cy="368300"/>
+            <a:ext cx="6305550" cy="398780"/>
           </a:xfrm>
           <a:prstGeom prst="rect">
             <a:avLst/>
@@ -3409,25 +3420,25 @@
           </a:bodyPr>
           <a:p>
             <a:r>
-              <a:rPr lang="en-US" altLang="zh-CN">
-                <a:latin typeface="Times New Roman" panose="02020603050405020304" charset="0"/>
-                <a:ea typeface="宋体" panose="02010600030101010101" pitchFamily="2" charset="-122"/>
-                <a:cs typeface="Times New Roman" panose="02020603050405020304" charset="0"/>
+              <a:rPr lang="en-US" altLang="zh-CN" sz="2000">
+                <a:latin typeface="微软雅黑" panose="020B0503020204020204" charset="-122"/>
+                <a:ea typeface="微软雅黑" panose="020B0503020204020204" charset="-122"/>
+                <a:cs typeface="微软雅黑" panose="020B0503020204020204" charset="-122"/>
               </a:rPr>
               <a:t>rag_agent.yaml:</a:t>
             </a:r>
             <a:r>
-              <a:rPr lang="zh-CN" altLang="en-US">
-                <a:latin typeface="Times New Roman" panose="02020603050405020304" charset="0"/>
-                <a:ea typeface="宋体" panose="02010600030101010101" pitchFamily="2" charset="-122"/>
-                <a:cs typeface="Times New Roman" panose="02020603050405020304" charset="0"/>
+              <a:rPr lang="zh-CN" altLang="en-US" sz="2000">
+                <a:latin typeface="微软雅黑" panose="020B0503020204020204" charset="-122"/>
+                <a:ea typeface="微软雅黑" panose="020B0503020204020204" charset="-122"/>
+                <a:cs typeface="微软雅黑" panose="020B0503020204020204" charset="-122"/>
               </a:rPr>
               <a:t>定义了智能体的整体行为和功能</a:t>
             </a:r>
-            <a:endParaRPr lang="zh-CN" altLang="en-US">
-              <a:latin typeface="Times New Roman" panose="02020603050405020304" charset="0"/>
-              <a:ea typeface="宋体" panose="02010600030101010101" pitchFamily="2" charset="-122"/>
-              <a:cs typeface="Times New Roman" panose="02020603050405020304" charset="0"/>
+            <a:endParaRPr lang="zh-CN" altLang="en-US" sz="2000">
+              <a:latin typeface="微软雅黑" panose="020B0503020204020204" charset="-122"/>
+              <a:ea typeface="微软雅黑" panose="020B0503020204020204" charset="-122"/>
+              <a:cs typeface="微软雅黑" panose="020B0503020204020204" charset="-122"/>
             </a:endParaRPr>
           </a:p>
         </p:txBody>
@@ -3440,7 +3451,7 @@
         </p:nvSpPr>
         <p:spPr>
           <a:xfrm>
-            <a:off x="93980" y="469900"/>
+            <a:off x="93980" y="500380"/>
             <a:ext cx="7504430" cy="3814445"/>
           </a:xfrm>
           <a:prstGeom prst="rect">
@@ -3468,9 +3479,9 @@
                 <a:solidFill>
                   <a:schemeClr val="tx1"/>
                 </a:solidFill>
-                <a:latin typeface="宋体" panose="02010600030101010101" pitchFamily="2" charset="-122"/>
-                <a:ea typeface="宋体" panose="02010600030101010101" pitchFamily="2" charset="-122"/>
-                <a:cs typeface="宋体" panose="02010600030101010101" pitchFamily="2" charset="-122"/>
+                <a:latin typeface="微软雅黑" panose="020B0503020204020204" charset="-122"/>
+                <a:ea typeface="微软雅黑" panose="020B0503020204020204" charset="-122"/>
+                <a:cs typeface="微软雅黑" panose="020B0503020204020204" charset="-122"/>
               </a:rPr>
               <a:t>全局设定（</a:t>
             </a:r>
@@ -3479,9 +3490,9 @@
                 <a:solidFill>
                   <a:schemeClr val="tx1"/>
                 </a:solidFill>
-                <a:latin typeface="宋体" panose="02010600030101010101" pitchFamily="2" charset="-122"/>
-                <a:ea typeface="宋体" panose="02010600030101010101" pitchFamily="2" charset="-122"/>
-                <a:cs typeface="宋体" panose="02010600030101010101" pitchFamily="2" charset="-122"/>
+                <a:latin typeface="微软雅黑" panose="020B0503020204020204" charset="-122"/>
+                <a:ea typeface="微软雅黑" panose="020B0503020204020204" charset="-122"/>
+                <a:cs typeface="微软雅黑" panose="020B0503020204020204" charset="-122"/>
               </a:rPr>
               <a:t>Profile</a:t>
             </a:r>
@@ -3490,9 +3501,9 @@
                 <a:solidFill>
                   <a:schemeClr val="tx1"/>
                 </a:solidFill>
-                <a:latin typeface="宋体" panose="02010600030101010101" pitchFamily="2" charset="-122"/>
-                <a:ea typeface="宋体" panose="02010600030101010101" pitchFamily="2" charset="-122"/>
-                <a:cs typeface="宋体" panose="02010600030101010101" pitchFamily="2" charset="-122"/>
+                <a:latin typeface="微软雅黑" panose="020B0503020204020204" charset="-122"/>
+                <a:ea typeface="微软雅黑" panose="020B0503020204020204" charset="-122"/>
+                <a:cs typeface="微软雅黑" panose="020B0503020204020204" charset="-122"/>
               </a:rPr>
               <a:t>）</a:t>
             </a:r>
@@ -3500,9 +3511,9 @@
               <a:solidFill>
                 <a:schemeClr val="tx1"/>
               </a:solidFill>
-              <a:latin typeface="宋体" panose="02010600030101010101" pitchFamily="2" charset="-122"/>
-              <a:ea typeface="宋体" panose="02010600030101010101" pitchFamily="2" charset="-122"/>
-              <a:cs typeface="宋体" panose="02010600030101010101" pitchFamily="2" charset="-122"/>
+              <a:latin typeface="微软雅黑" panose="020B0503020204020204" charset="-122"/>
+              <a:ea typeface="微软雅黑" panose="020B0503020204020204" charset="-122"/>
+              <a:cs typeface="微软雅黑" panose="020B0503020204020204" charset="-122"/>
             </a:endParaRPr>
           </a:p>
           <a:p>
@@ -3522,20 +3533,20 @@
                 <a:solidFill>
                   <a:schemeClr val="tx1"/>
                 </a:solidFill>
-                <a:latin typeface="宋体" panose="02010600030101010101" pitchFamily="2" charset="-122"/>
-                <a:ea typeface="宋体" panose="02010600030101010101" pitchFamily="2" charset="-122"/>
-                <a:cs typeface="宋体" panose="02010600030101010101" pitchFamily="2" charset="-122"/>
-              </a:rPr>
-              <a:t>该部分是</a:t>
+                <a:latin typeface="微软雅黑" panose="020B0503020204020204" charset="-122"/>
+                <a:ea typeface="微软雅黑" panose="020B0503020204020204" charset="-122"/>
+                <a:cs typeface="微软雅黑" panose="020B0503020204020204" charset="-122"/>
+              </a:rPr>
+              <a:t>包含了</a:t>
             </a:r>
             <a:r>
               <a:rPr lang="en-US" altLang="zh-CN" sz="1600" b="0" i="0">
                 <a:solidFill>
                   <a:schemeClr val="tx1"/>
                 </a:solidFill>
-                <a:latin typeface="宋体" panose="02010600030101010101" pitchFamily="2" charset="-122"/>
-                <a:ea typeface="宋体" panose="02010600030101010101" pitchFamily="2" charset="-122"/>
-                <a:cs typeface="宋体" panose="02010600030101010101" pitchFamily="2" charset="-122"/>
+                <a:latin typeface="微软雅黑" panose="020B0503020204020204" charset="-122"/>
+                <a:ea typeface="微软雅黑" panose="020B0503020204020204" charset="-122"/>
+                <a:cs typeface="微软雅黑" panose="020B0503020204020204" charset="-122"/>
               </a:rPr>
               <a:t>Agent</a:t>
             </a:r>
@@ -3544,53 +3555,53 @@
                 <a:solidFill>
                   <a:schemeClr val="tx1"/>
                 </a:solidFill>
-                <a:latin typeface="宋体" panose="02010600030101010101" pitchFamily="2" charset="-122"/>
-                <a:ea typeface="宋体" panose="02010600030101010101" pitchFamily="2" charset="-122"/>
-                <a:cs typeface="宋体" panose="02010600030101010101" pitchFamily="2" charset="-122"/>
-              </a:rPr>
-              <a:t>的全局设定，包含了</a:t>
+                <a:latin typeface="微软雅黑" panose="020B0503020204020204" charset="-122"/>
+                <a:ea typeface="微软雅黑" panose="020B0503020204020204" charset="-122"/>
+                <a:cs typeface="微软雅黑" panose="020B0503020204020204" charset="-122"/>
+              </a:rPr>
+              <a:t>的</a:t>
             </a:r>
             <a:r>
               <a:rPr lang="en-US" altLang="zh-CN" sz="1600" b="0" i="0">
                 <a:solidFill>
                   <a:schemeClr val="tx1"/>
                 </a:solidFill>
-                <a:latin typeface="宋体" panose="02010600030101010101" pitchFamily="2" charset="-122"/>
-                <a:ea typeface="宋体" panose="02010600030101010101" pitchFamily="2" charset="-122"/>
-                <a:cs typeface="宋体" panose="02010600030101010101" pitchFamily="2" charset="-122"/>
-              </a:rPr>
-              <a:t>Agent</a:t>
+                <a:latin typeface="微软雅黑" panose="020B0503020204020204" charset="-122"/>
+                <a:ea typeface="微软雅黑" panose="020B0503020204020204" charset="-122"/>
+                <a:cs typeface="微软雅黑" panose="020B0503020204020204" charset="-122"/>
+              </a:rPr>
+              <a:t>Target</a:t>
             </a:r>
             <a:r>
               <a:rPr lang="zh-CN" altLang="en-US" sz="1600" b="0" i="0">
                 <a:solidFill>
                   <a:schemeClr val="tx1"/>
                 </a:solidFill>
-                <a:latin typeface="宋体" panose="02010600030101010101" pitchFamily="2" charset="-122"/>
-                <a:ea typeface="宋体" panose="02010600030101010101" pitchFamily="2" charset="-122"/>
-                <a:cs typeface="宋体" panose="02010600030101010101" pitchFamily="2" charset="-122"/>
-              </a:rPr>
-              <a:t>的</a:t>
+                <a:latin typeface="微软雅黑" panose="020B0503020204020204" charset="-122"/>
+                <a:ea typeface="微软雅黑" panose="020B0503020204020204" charset="-122"/>
+                <a:cs typeface="微软雅黑" panose="020B0503020204020204" charset="-122"/>
+              </a:rPr>
+              <a:t>、</a:t>
             </a:r>
             <a:r>
               <a:rPr lang="en-US" altLang="zh-CN" sz="1600" b="0" i="0">
                 <a:solidFill>
                   <a:schemeClr val="tx1"/>
                 </a:solidFill>
-                <a:latin typeface="宋体" panose="02010600030101010101" pitchFamily="2" charset="-122"/>
-                <a:ea typeface="宋体" panose="02010600030101010101" pitchFamily="2" charset="-122"/>
-                <a:cs typeface="宋体" panose="02010600030101010101" pitchFamily="2" charset="-122"/>
-              </a:rPr>
-              <a:t>Target</a:t>
+                <a:latin typeface="微软雅黑" panose="020B0503020204020204" charset="-122"/>
+                <a:ea typeface="微软雅黑" panose="020B0503020204020204" charset="-122"/>
+                <a:cs typeface="微软雅黑" panose="020B0503020204020204" charset="-122"/>
+              </a:rPr>
+              <a:t>Introduction</a:t>
             </a:r>
             <a:r>
               <a:rPr lang="zh-CN" altLang="en-US" sz="1600" b="0" i="0">
                 <a:solidFill>
                   <a:schemeClr val="tx1"/>
                 </a:solidFill>
-                <a:latin typeface="宋体" panose="02010600030101010101" pitchFamily="2" charset="-122"/>
-                <a:ea typeface="宋体" panose="02010600030101010101" pitchFamily="2" charset="-122"/>
-                <a:cs typeface="宋体" panose="02010600030101010101" pitchFamily="2" charset="-122"/>
+                <a:latin typeface="微软雅黑" panose="020B0503020204020204" charset="-122"/>
+                <a:ea typeface="微软雅黑" panose="020B0503020204020204" charset="-122"/>
+                <a:cs typeface="微软雅黑" panose="020B0503020204020204" charset="-122"/>
               </a:rPr>
               <a:t>、</a:t>
             </a:r>
@@ -3599,42 +3610,20 @@
                 <a:solidFill>
                   <a:schemeClr val="tx1"/>
                 </a:solidFill>
-                <a:latin typeface="宋体" panose="02010600030101010101" pitchFamily="2" charset="-122"/>
-                <a:ea typeface="宋体" panose="02010600030101010101" pitchFamily="2" charset="-122"/>
-                <a:cs typeface="宋体" panose="02010600030101010101" pitchFamily="2" charset="-122"/>
-              </a:rPr>
-              <a:t>Introduction</a:t>
+                <a:latin typeface="微软雅黑" panose="020B0503020204020204" charset="-122"/>
+                <a:ea typeface="微软雅黑" panose="020B0503020204020204" charset="-122"/>
+                <a:cs typeface="微软雅黑" panose="020B0503020204020204" charset="-122"/>
+              </a:rPr>
+              <a:t>LLM</a:t>
             </a:r>
             <a:r>
               <a:rPr lang="zh-CN" altLang="en-US" sz="1600" b="0" i="0">
                 <a:solidFill>
                   <a:schemeClr val="tx1"/>
                 </a:solidFill>
-                <a:latin typeface="宋体" panose="02010600030101010101" pitchFamily="2" charset="-122"/>
-                <a:ea typeface="宋体" panose="02010600030101010101" pitchFamily="2" charset="-122"/>
-                <a:cs typeface="宋体" panose="02010600030101010101" pitchFamily="2" charset="-122"/>
-              </a:rPr>
-              <a:t>、</a:t>
-            </a:r>
-            <a:r>
-              <a:rPr lang="en-US" altLang="zh-CN" sz="1600" b="0" i="0">
-                <a:solidFill>
-                  <a:schemeClr val="tx1"/>
-                </a:solidFill>
-                <a:latin typeface="宋体" panose="02010600030101010101" pitchFamily="2" charset="-122"/>
-                <a:ea typeface="宋体" panose="02010600030101010101" pitchFamily="2" charset="-122"/>
-                <a:cs typeface="宋体" panose="02010600030101010101" pitchFamily="2" charset="-122"/>
-              </a:rPr>
-              <a:t>LLM</a:t>
-            </a:r>
-            <a:r>
-              <a:rPr lang="zh-CN" altLang="en-US" sz="1600" b="0" i="0">
-                <a:solidFill>
-                  <a:schemeClr val="tx1"/>
-                </a:solidFill>
-                <a:latin typeface="宋体" panose="02010600030101010101" pitchFamily="2" charset="-122"/>
-                <a:ea typeface="宋体" panose="02010600030101010101" pitchFamily="2" charset="-122"/>
-                <a:cs typeface="宋体" panose="02010600030101010101" pitchFamily="2" charset="-122"/>
+                <a:latin typeface="微软雅黑" panose="020B0503020204020204" charset="-122"/>
+                <a:ea typeface="微软雅黑" panose="020B0503020204020204" charset="-122"/>
+                <a:cs typeface="微软雅黑" panose="020B0503020204020204" charset="-122"/>
               </a:rPr>
               <a:t>部分。</a:t>
             </a:r>
@@ -3642,9 +3631,9 @@
               <a:solidFill>
                 <a:schemeClr val="tx1"/>
               </a:solidFill>
-              <a:latin typeface="宋体" panose="02010600030101010101" pitchFamily="2" charset="-122"/>
-              <a:ea typeface="宋体" panose="02010600030101010101" pitchFamily="2" charset="-122"/>
-              <a:cs typeface="宋体" panose="02010600030101010101" pitchFamily="2" charset="-122"/>
+              <a:latin typeface="微软雅黑" panose="020B0503020204020204" charset="-122"/>
+              <a:ea typeface="微软雅黑" panose="020B0503020204020204" charset="-122"/>
+              <a:cs typeface="微软雅黑" panose="020B0503020204020204" charset="-122"/>
             </a:endParaRPr>
           </a:p>
           <a:p>
@@ -3664,9 +3653,9 @@
                 <a:solidFill>
                   <a:schemeClr val="tx1"/>
                 </a:solidFill>
-                <a:latin typeface="宋体" panose="02010600030101010101" pitchFamily="2" charset="-122"/>
-                <a:ea typeface="宋体" panose="02010600030101010101" pitchFamily="2" charset="-122"/>
-                <a:cs typeface="宋体" panose="02010600030101010101" pitchFamily="2" charset="-122"/>
+                <a:latin typeface="微软雅黑" panose="020B0503020204020204" charset="-122"/>
+                <a:ea typeface="微软雅黑" panose="020B0503020204020204" charset="-122"/>
+                <a:cs typeface="微软雅黑" panose="020B0503020204020204" charset="-122"/>
               </a:rPr>
               <a:t>介绍（</a:t>
             </a:r>
@@ -3675,9 +3664,9 @@
                 <a:solidFill>
                   <a:schemeClr val="tx1"/>
                 </a:solidFill>
-                <a:latin typeface="宋体" panose="02010600030101010101" pitchFamily="2" charset="-122"/>
-                <a:ea typeface="宋体" panose="02010600030101010101" pitchFamily="2" charset="-122"/>
-                <a:cs typeface="宋体" panose="02010600030101010101" pitchFamily="2" charset="-122"/>
+                <a:latin typeface="微软雅黑" panose="020B0503020204020204" charset="-122"/>
+                <a:ea typeface="微软雅黑" panose="020B0503020204020204" charset="-122"/>
+                <a:cs typeface="微软雅黑" panose="020B0503020204020204" charset="-122"/>
               </a:rPr>
               <a:t>Introduction</a:t>
             </a:r>
@@ -3686,9 +3675,9 @@
                 <a:solidFill>
                   <a:schemeClr val="tx1"/>
                 </a:solidFill>
-                <a:latin typeface="宋体" panose="02010600030101010101" pitchFamily="2" charset="-122"/>
-                <a:ea typeface="宋体" panose="02010600030101010101" pitchFamily="2" charset="-122"/>
-                <a:cs typeface="宋体" panose="02010600030101010101" pitchFamily="2" charset="-122"/>
+                <a:latin typeface="微软雅黑" panose="020B0503020204020204" charset="-122"/>
+                <a:ea typeface="微软雅黑" panose="020B0503020204020204" charset="-122"/>
+                <a:cs typeface="微软雅黑" panose="020B0503020204020204" charset="-122"/>
               </a:rPr>
               <a:t>）</a:t>
             </a:r>
@@ -3696,9 +3685,9 @@
               <a:solidFill>
                 <a:schemeClr val="tx1"/>
               </a:solidFill>
-              <a:latin typeface="宋体" panose="02010600030101010101" pitchFamily="2" charset="-122"/>
-              <a:ea typeface="宋体" panose="02010600030101010101" pitchFamily="2" charset="-122"/>
-              <a:cs typeface="宋体" panose="02010600030101010101" pitchFamily="2" charset="-122"/>
+              <a:latin typeface="微软雅黑" panose="020B0503020204020204" charset="-122"/>
+              <a:ea typeface="微软雅黑" panose="020B0503020204020204" charset="-122"/>
+              <a:cs typeface="微软雅黑" panose="020B0503020204020204" charset="-122"/>
             </a:endParaRPr>
           </a:p>
           <a:p>
@@ -3718,9 +3707,9 @@
                 <a:solidFill>
                   <a:schemeClr val="tx1"/>
                 </a:solidFill>
-                <a:latin typeface="宋体" panose="02010600030101010101" pitchFamily="2" charset="-122"/>
-                <a:ea typeface="宋体" panose="02010600030101010101" pitchFamily="2" charset="-122"/>
-                <a:cs typeface="宋体" panose="02010600030101010101" pitchFamily="2" charset="-122"/>
+                <a:latin typeface="微软雅黑" panose="020B0503020204020204" charset="-122"/>
+                <a:ea typeface="微软雅黑" panose="020B0503020204020204" charset="-122"/>
+                <a:cs typeface="微软雅黑" panose="020B0503020204020204" charset="-122"/>
               </a:rPr>
               <a:t>对于</a:t>
             </a:r>
@@ -3729,9 +3718,9 @@
                 <a:solidFill>
                   <a:schemeClr val="tx1"/>
                 </a:solidFill>
-                <a:latin typeface="宋体" panose="02010600030101010101" pitchFamily="2" charset="-122"/>
-                <a:ea typeface="宋体" panose="02010600030101010101" pitchFamily="2" charset="-122"/>
-                <a:cs typeface="宋体" panose="02010600030101010101" pitchFamily="2" charset="-122"/>
+                <a:latin typeface="微软雅黑" panose="020B0503020204020204" charset="-122"/>
+                <a:ea typeface="微软雅黑" panose="020B0503020204020204" charset="-122"/>
+                <a:cs typeface="微软雅黑" panose="020B0503020204020204" charset="-122"/>
               </a:rPr>
               <a:t>Agent</a:t>
             </a:r>
@@ -3740,9 +3729,9 @@
                 <a:solidFill>
                   <a:schemeClr val="tx1"/>
                 </a:solidFill>
-                <a:latin typeface="宋体" panose="02010600030101010101" pitchFamily="2" charset="-122"/>
-                <a:ea typeface="宋体" panose="02010600030101010101" pitchFamily="2" charset="-122"/>
-                <a:cs typeface="宋体" panose="02010600030101010101" pitchFamily="2" charset="-122"/>
+                <a:latin typeface="微软雅黑" panose="020B0503020204020204" charset="-122"/>
+                <a:ea typeface="微软雅黑" panose="020B0503020204020204" charset="-122"/>
+                <a:cs typeface="微软雅黑" panose="020B0503020204020204" charset="-122"/>
               </a:rPr>
               <a:t>的角色描述</a:t>
             </a:r>
@@ -3750,9 +3739,9 @@
               <a:solidFill>
                 <a:schemeClr val="tx1"/>
               </a:solidFill>
-              <a:latin typeface="宋体" panose="02010600030101010101" pitchFamily="2" charset="-122"/>
-              <a:ea typeface="宋体" panose="02010600030101010101" pitchFamily="2" charset="-122"/>
-              <a:cs typeface="宋体" panose="02010600030101010101" pitchFamily="2" charset="-122"/>
+              <a:latin typeface="微软雅黑" panose="020B0503020204020204" charset="-122"/>
+              <a:ea typeface="微软雅黑" panose="020B0503020204020204" charset="-122"/>
+              <a:cs typeface="微软雅黑" panose="020B0503020204020204" charset="-122"/>
             </a:endParaRPr>
           </a:p>
           <a:p>
@@ -3772,9 +3761,9 @@
                 <a:solidFill>
                   <a:schemeClr val="tx1"/>
                 </a:solidFill>
-                <a:latin typeface="宋体" panose="02010600030101010101" pitchFamily="2" charset="-122"/>
-                <a:ea typeface="宋体" panose="02010600030101010101" pitchFamily="2" charset="-122"/>
-                <a:cs typeface="宋体" panose="02010600030101010101" pitchFamily="2" charset="-122"/>
+                <a:latin typeface="微软雅黑" panose="020B0503020204020204" charset="-122"/>
+                <a:ea typeface="微软雅黑" panose="020B0503020204020204" charset="-122"/>
+                <a:cs typeface="微软雅黑" panose="020B0503020204020204" charset="-122"/>
               </a:rPr>
               <a:t>目标（</a:t>
             </a:r>
@@ -3783,9 +3772,9 @@
                 <a:solidFill>
                   <a:schemeClr val="tx1"/>
                 </a:solidFill>
-                <a:latin typeface="宋体" panose="02010600030101010101" pitchFamily="2" charset="-122"/>
-                <a:ea typeface="宋体" panose="02010600030101010101" pitchFamily="2" charset="-122"/>
-                <a:cs typeface="宋体" panose="02010600030101010101" pitchFamily="2" charset="-122"/>
+                <a:latin typeface="微软雅黑" panose="020B0503020204020204" charset="-122"/>
+                <a:ea typeface="微软雅黑" panose="020B0503020204020204" charset="-122"/>
+                <a:cs typeface="微软雅黑" panose="020B0503020204020204" charset="-122"/>
               </a:rPr>
               <a:t>Target</a:t>
             </a:r>
@@ -3794,9 +3783,9 @@
                 <a:solidFill>
                   <a:schemeClr val="tx1"/>
                 </a:solidFill>
-                <a:latin typeface="宋体" panose="02010600030101010101" pitchFamily="2" charset="-122"/>
-                <a:ea typeface="宋体" panose="02010600030101010101" pitchFamily="2" charset="-122"/>
-                <a:cs typeface="宋体" panose="02010600030101010101" pitchFamily="2" charset="-122"/>
+                <a:latin typeface="微软雅黑" panose="020B0503020204020204" charset="-122"/>
+                <a:ea typeface="微软雅黑" panose="020B0503020204020204" charset="-122"/>
+                <a:cs typeface="微软雅黑" panose="020B0503020204020204" charset="-122"/>
               </a:rPr>
               <a:t>）</a:t>
             </a:r>
@@ -3804,9 +3793,9 @@
               <a:solidFill>
                 <a:schemeClr val="tx1"/>
               </a:solidFill>
-              <a:latin typeface="宋体" panose="02010600030101010101" pitchFamily="2" charset="-122"/>
-              <a:ea typeface="宋体" panose="02010600030101010101" pitchFamily="2" charset="-122"/>
-              <a:cs typeface="宋体" panose="02010600030101010101" pitchFamily="2" charset="-122"/>
+              <a:latin typeface="微软雅黑" panose="020B0503020204020204" charset="-122"/>
+              <a:ea typeface="微软雅黑" panose="020B0503020204020204" charset="-122"/>
+              <a:cs typeface="微软雅黑" panose="020B0503020204020204" charset="-122"/>
             </a:endParaRPr>
           </a:p>
           <a:p>
@@ -3826,42 +3815,20 @@
                 <a:solidFill>
                   <a:schemeClr val="tx1"/>
                 </a:solidFill>
-                <a:latin typeface="宋体" panose="02010600030101010101" pitchFamily="2" charset="-122"/>
-                <a:ea typeface="宋体" panose="02010600030101010101" pitchFamily="2" charset="-122"/>
-                <a:cs typeface="宋体" panose="02010600030101010101" pitchFamily="2" charset="-122"/>
-              </a:rPr>
-              <a:t>Agent</a:t>
+                <a:latin typeface="微软雅黑" panose="020B0503020204020204" charset="-122"/>
+                <a:ea typeface="微软雅黑" panose="020B0503020204020204" charset="-122"/>
+                <a:cs typeface="微软雅黑" panose="020B0503020204020204" charset="-122"/>
+              </a:rPr>
+              <a:t> Agent</a:t>
             </a:r>
             <a:r>
               <a:rPr lang="zh-CN" altLang="en-US" sz="1600" b="0" i="0">
                 <a:solidFill>
                   <a:schemeClr val="tx1"/>
                 </a:solidFill>
-                <a:latin typeface="宋体" panose="02010600030101010101" pitchFamily="2" charset="-122"/>
-                <a:ea typeface="宋体" panose="02010600030101010101" pitchFamily="2" charset="-122"/>
-                <a:cs typeface="宋体" panose="02010600030101010101" pitchFamily="2" charset="-122"/>
-              </a:rPr>
-              <a:t>需要实现的核心目标</a:t>
-            </a:r>
-            <a:r>
-              <a:rPr lang="en-US" altLang="zh-CN" sz="1600" b="0" i="0">
-                <a:solidFill>
-                  <a:schemeClr val="tx1"/>
-                </a:solidFill>
-                <a:latin typeface="宋体" panose="02010600030101010101" pitchFamily="2" charset="-122"/>
-                <a:ea typeface="宋体" panose="02010600030101010101" pitchFamily="2" charset="-122"/>
-                <a:cs typeface="宋体" panose="02010600030101010101" pitchFamily="2" charset="-122"/>
-              </a:rPr>
-              <a:t>, Agent</a:t>
-            </a:r>
-            <a:r>
-              <a:rPr lang="zh-CN" altLang="en-US" sz="1600" b="0" i="0">
-                <a:solidFill>
-                  <a:schemeClr val="tx1"/>
-                </a:solidFill>
-                <a:latin typeface="宋体" panose="02010600030101010101" pitchFamily="2" charset="-122"/>
-                <a:ea typeface="宋体" panose="02010600030101010101" pitchFamily="2" charset="-122"/>
-                <a:cs typeface="宋体" panose="02010600030101010101" pitchFamily="2" charset="-122"/>
+                <a:latin typeface="微软雅黑" panose="020B0503020204020204" charset="-122"/>
+                <a:ea typeface="微软雅黑" panose="020B0503020204020204" charset="-122"/>
+                <a:cs typeface="微软雅黑" panose="020B0503020204020204" charset="-122"/>
               </a:rPr>
               <a:t>会围绕着这个目标去完成后续一系列的工作</a:t>
             </a:r>
@@ -3869,9 +3836,9 @@
               <a:solidFill>
                 <a:schemeClr val="tx1"/>
               </a:solidFill>
-              <a:latin typeface="宋体" panose="02010600030101010101" pitchFamily="2" charset="-122"/>
-              <a:ea typeface="宋体" panose="02010600030101010101" pitchFamily="2" charset="-122"/>
-              <a:cs typeface="宋体" panose="02010600030101010101" pitchFamily="2" charset="-122"/>
+              <a:latin typeface="微软雅黑" panose="020B0503020204020204" charset="-122"/>
+              <a:ea typeface="微软雅黑" panose="020B0503020204020204" charset="-122"/>
+              <a:cs typeface="微软雅黑" panose="020B0503020204020204" charset="-122"/>
             </a:endParaRPr>
           </a:p>
           <a:p>
@@ -3891,9 +3858,9 @@
                 <a:solidFill>
                   <a:schemeClr val="tx1"/>
                 </a:solidFill>
-                <a:latin typeface="宋体" panose="02010600030101010101" pitchFamily="2" charset="-122"/>
-                <a:ea typeface="宋体" panose="02010600030101010101" pitchFamily="2" charset="-122"/>
-                <a:cs typeface="宋体" panose="02010600030101010101" pitchFamily="2" charset="-122"/>
+                <a:latin typeface="微软雅黑" panose="020B0503020204020204" charset="-122"/>
+                <a:ea typeface="微软雅黑" panose="020B0503020204020204" charset="-122"/>
+                <a:cs typeface="微软雅黑" panose="020B0503020204020204" charset="-122"/>
               </a:rPr>
               <a:t>指令（</a:t>
             </a:r>
@@ -3902,9 +3869,9 @@
                 <a:solidFill>
                   <a:schemeClr val="tx1"/>
                 </a:solidFill>
-                <a:latin typeface="宋体" panose="02010600030101010101" pitchFamily="2" charset="-122"/>
-                <a:ea typeface="宋体" panose="02010600030101010101" pitchFamily="2" charset="-122"/>
-                <a:cs typeface="宋体" panose="02010600030101010101" pitchFamily="2" charset="-122"/>
+                <a:latin typeface="微软雅黑" panose="020B0503020204020204" charset="-122"/>
+                <a:ea typeface="微软雅黑" panose="020B0503020204020204" charset="-122"/>
+                <a:cs typeface="微软雅黑" panose="020B0503020204020204" charset="-122"/>
               </a:rPr>
               <a:t>Instruction</a:t>
             </a:r>
@@ -3913,9 +3880,9 @@
                 <a:solidFill>
                   <a:schemeClr val="tx1"/>
                 </a:solidFill>
-                <a:latin typeface="宋体" panose="02010600030101010101" pitchFamily="2" charset="-122"/>
-                <a:ea typeface="宋体" panose="02010600030101010101" pitchFamily="2" charset="-122"/>
-                <a:cs typeface="宋体" panose="02010600030101010101" pitchFamily="2" charset="-122"/>
+                <a:latin typeface="微软雅黑" panose="020B0503020204020204" charset="-122"/>
+                <a:ea typeface="微软雅黑" panose="020B0503020204020204" charset="-122"/>
+                <a:cs typeface="微软雅黑" panose="020B0503020204020204" charset="-122"/>
               </a:rPr>
               <a:t>）</a:t>
             </a:r>
@@ -3923,9 +3890,9 @@
               <a:solidFill>
                 <a:schemeClr val="tx1"/>
               </a:solidFill>
-              <a:latin typeface="宋体" panose="02010600030101010101" pitchFamily="2" charset="-122"/>
-              <a:ea typeface="宋体" panose="02010600030101010101" pitchFamily="2" charset="-122"/>
-              <a:cs typeface="宋体" panose="02010600030101010101" pitchFamily="2" charset="-122"/>
+              <a:latin typeface="微软雅黑" panose="020B0503020204020204" charset="-122"/>
+              <a:ea typeface="微软雅黑" panose="020B0503020204020204" charset="-122"/>
+              <a:cs typeface="微软雅黑" panose="020B0503020204020204" charset="-122"/>
             </a:endParaRPr>
           </a:p>
           <a:p>
@@ -3945,9 +3912,9 @@
                 <a:solidFill>
                   <a:schemeClr val="tx1"/>
                 </a:solidFill>
-                <a:latin typeface="宋体" panose="02010600030101010101" pitchFamily="2" charset="-122"/>
-                <a:ea typeface="宋体" panose="02010600030101010101" pitchFamily="2" charset="-122"/>
-                <a:cs typeface="宋体" panose="02010600030101010101" pitchFamily="2" charset="-122"/>
+                <a:latin typeface="微软雅黑" panose="020B0503020204020204" charset="-122"/>
+                <a:ea typeface="微软雅黑" panose="020B0503020204020204" charset="-122"/>
+                <a:cs typeface="微软雅黑" panose="020B0503020204020204" charset="-122"/>
               </a:rPr>
               <a:t>包含了对于</a:t>
             </a:r>
@@ -3956,9 +3923,9 @@
                 <a:solidFill>
                   <a:schemeClr val="tx1"/>
                 </a:solidFill>
-                <a:latin typeface="宋体" panose="02010600030101010101" pitchFamily="2" charset="-122"/>
-                <a:ea typeface="宋体" panose="02010600030101010101" pitchFamily="2" charset="-122"/>
-                <a:cs typeface="宋体" panose="02010600030101010101" pitchFamily="2" charset="-122"/>
+                <a:latin typeface="微软雅黑" panose="020B0503020204020204" charset="-122"/>
+                <a:ea typeface="微软雅黑" panose="020B0503020204020204" charset="-122"/>
+                <a:cs typeface="微软雅黑" panose="020B0503020204020204" charset="-122"/>
               </a:rPr>
               <a:t>Agent</a:t>
             </a:r>
@@ -3967,9 +3934,9 @@
                 <a:solidFill>
                   <a:schemeClr val="tx1"/>
                 </a:solidFill>
-                <a:latin typeface="宋体" panose="02010600030101010101" pitchFamily="2" charset="-122"/>
-                <a:ea typeface="宋体" panose="02010600030101010101" pitchFamily="2" charset="-122"/>
-                <a:cs typeface="宋体" panose="02010600030101010101" pitchFamily="2" charset="-122"/>
+                <a:latin typeface="微软雅黑" panose="020B0503020204020204" charset="-122"/>
+                <a:ea typeface="微软雅黑" panose="020B0503020204020204" charset="-122"/>
+                <a:cs typeface="微软雅黑" panose="020B0503020204020204" charset="-122"/>
               </a:rPr>
               <a:t>的具体设定，如性格设定、背景知识、行为指导等</a:t>
             </a:r>
@@ -3977,9 +3944,9 @@
               <a:solidFill>
                 <a:schemeClr val="tx1"/>
               </a:solidFill>
-              <a:latin typeface="宋体" panose="02010600030101010101" pitchFamily="2" charset="-122"/>
-              <a:ea typeface="宋体" panose="02010600030101010101" pitchFamily="2" charset="-122"/>
-              <a:cs typeface="宋体" panose="02010600030101010101" pitchFamily="2" charset="-122"/>
+              <a:latin typeface="微软雅黑" panose="020B0503020204020204" charset="-122"/>
+              <a:ea typeface="微软雅黑" panose="020B0503020204020204" charset="-122"/>
+              <a:cs typeface="微软雅黑" panose="020B0503020204020204" charset="-122"/>
             </a:endParaRPr>
           </a:p>
           <a:p>
@@ -3999,9 +3966,9 @@
                 <a:solidFill>
                   <a:schemeClr val="tx1"/>
                 </a:solidFill>
-                <a:latin typeface="宋体" panose="02010600030101010101" pitchFamily="2" charset="-122"/>
-                <a:ea typeface="宋体" panose="02010600030101010101" pitchFamily="2" charset="-122"/>
-                <a:cs typeface="宋体" panose="02010600030101010101" pitchFamily="2" charset="-122"/>
+                <a:latin typeface="微软雅黑" panose="020B0503020204020204" charset="-122"/>
+                <a:ea typeface="微软雅黑" panose="020B0503020204020204" charset="-122"/>
+                <a:cs typeface="微软雅黑" panose="020B0503020204020204" charset="-122"/>
               </a:rPr>
               <a:t>模型（</a:t>
             </a:r>
@@ -4010,9 +3977,9 @@
                 <a:solidFill>
                   <a:schemeClr val="tx1"/>
                 </a:solidFill>
-                <a:latin typeface="宋体" panose="02010600030101010101" pitchFamily="2" charset="-122"/>
-                <a:ea typeface="宋体" panose="02010600030101010101" pitchFamily="2" charset="-122"/>
-                <a:cs typeface="宋体" panose="02010600030101010101" pitchFamily="2" charset="-122"/>
+                <a:latin typeface="微软雅黑" panose="020B0503020204020204" charset="-122"/>
+                <a:ea typeface="微软雅黑" panose="020B0503020204020204" charset="-122"/>
+                <a:cs typeface="微软雅黑" panose="020B0503020204020204" charset="-122"/>
               </a:rPr>
               <a:t>LLM</a:t>
             </a:r>
@@ -4021,9 +3988,9 @@
                 <a:solidFill>
                   <a:schemeClr val="tx1"/>
                 </a:solidFill>
-                <a:latin typeface="宋体" panose="02010600030101010101" pitchFamily="2" charset="-122"/>
-                <a:ea typeface="宋体" panose="02010600030101010101" pitchFamily="2" charset="-122"/>
-                <a:cs typeface="宋体" panose="02010600030101010101" pitchFamily="2" charset="-122"/>
+                <a:latin typeface="微软雅黑" panose="020B0503020204020204" charset="-122"/>
+                <a:ea typeface="微软雅黑" panose="020B0503020204020204" charset="-122"/>
+                <a:cs typeface="微软雅黑" panose="020B0503020204020204" charset="-122"/>
               </a:rPr>
               <a:t>）</a:t>
             </a:r>
@@ -4031,9 +3998,9 @@
               <a:solidFill>
                 <a:schemeClr val="tx1"/>
               </a:solidFill>
-              <a:latin typeface="宋体" panose="02010600030101010101" pitchFamily="2" charset="-122"/>
-              <a:ea typeface="宋体" panose="02010600030101010101" pitchFamily="2" charset="-122"/>
-              <a:cs typeface="宋体" panose="02010600030101010101" pitchFamily="2" charset="-122"/>
+              <a:latin typeface="微软雅黑" panose="020B0503020204020204" charset="-122"/>
+              <a:ea typeface="微软雅黑" panose="020B0503020204020204" charset="-122"/>
+              <a:cs typeface="微软雅黑" panose="020B0503020204020204" charset="-122"/>
             </a:endParaRPr>
           </a:p>
           <a:p>
@@ -4053,9 +4020,9 @@
                 <a:solidFill>
                   <a:schemeClr val="tx1"/>
                 </a:solidFill>
-                <a:latin typeface="宋体" panose="02010600030101010101" pitchFamily="2" charset="-122"/>
-                <a:ea typeface="宋体" panose="02010600030101010101" pitchFamily="2" charset="-122"/>
-                <a:cs typeface="宋体" panose="02010600030101010101" pitchFamily="2" charset="-122"/>
+                <a:latin typeface="微软雅黑" panose="020B0503020204020204" charset="-122"/>
+                <a:ea typeface="微软雅黑" panose="020B0503020204020204" charset="-122"/>
+                <a:cs typeface="微软雅黑" panose="020B0503020204020204" charset="-122"/>
               </a:rPr>
               <a:t>智能体</a:t>
             </a:r>
@@ -4064,9 +4031,9 @@
                 <a:solidFill>
                   <a:schemeClr val="tx1"/>
                 </a:solidFill>
-                <a:latin typeface="宋体" panose="02010600030101010101" pitchFamily="2" charset="-122"/>
-                <a:ea typeface="宋体" panose="02010600030101010101" pitchFamily="2" charset="-122"/>
-                <a:cs typeface="宋体" panose="02010600030101010101" pitchFamily="2" charset="-122"/>
+                <a:latin typeface="微软雅黑" panose="020B0503020204020204" charset="-122"/>
+                <a:ea typeface="微软雅黑" panose="020B0503020204020204" charset="-122"/>
+                <a:cs typeface="微软雅黑" panose="020B0503020204020204" charset="-122"/>
               </a:rPr>
               <a:t>(Agent)</a:t>
             </a:r>
@@ -4075,9 +4042,9 @@
                 <a:solidFill>
                   <a:schemeClr val="tx1"/>
                 </a:solidFill>
-                <a:latin typeface="宋体" panose="02010600030101010101" pitchFamily="2" charset="-122"/>
-                <a:ea typeface="宋体" panose="02010600030101010101" pitchFamily="2" charset="-122"/>
-                <a:cs typeface="宋体" panose="02010600030101010101" pitchFamily="2" charset="-122"/>
+                <a:latin typeface="微软雅黑" panose="020B0503020204020204" charset="-122"/>
+                <a:ea typeface="微软雅黑" panose="020B0503020204020204" charset="-122"/>
+                <a:cs typeface="微软雅黑" panose="020B0503020204020204" charset="-122"/>
               </a:rPr>
               <a:t>使用的</a:t>
             </a:r>
@@ -4086,9 +4053,9 @@
                 <a:solidFill>
                   <a:schemeClr val="tx1"/>
                 </a:solidFill>
-                <a:latin typeface="宋体" panose="02010600030101010101" pitchFamily="2" charset="-122"/>
-                <a:ea typeface="宋体" panose="02010600030101010101" pitchFamily="2" charset="-122"/>
-                <a:cs typeface="宋体" panose="02010600030101010101" pitchFamily="2" charset="-122"/>
+                <a:latin typeface="微软雅黑" panose="020B0503020204020204" charset="-122"/>
+                <a:ea typeface="微软雅黑" panose="020B0503020204020204" charset="-122"/>
+                <a:cs typeface="微软雅黑" panose="020B0503020204020204" charset="-122"/>
               </a:rPr>
               <a:t>LLM</a:t>
             </a:r>
@@ -4097,9 +4064,9 @@
                 <a:solidFill>
                   <a:schemeClr val="tx1"/>
                 </a:solidFill>
-                <a:latin typeface="宋体" panose="02010600030101010101" pitchFamily="2" charset="-122"/>
-                <a:ea typeface="宋体" panose="02010600030101010101" pitchFamily="2" charset="-122"/>
-                <a:cs typeface="宋体" panose="02010600030101010101" pitchFamily="2" charset="-122"/>
+                <a:latin typeface="微软雅黑" panose="020B0503020204020204" charset="-122"/>
+                <a:ea typeface="微软雅黑" panose="020B0503020204020204" charset="-122"/>
+                <a:cs typeface="微软雅黑" panose="020B0503020204020204" charset="-122"/>
               </a:rPr>
               <a:t>。</a:t>
             </a:r>
@@ -4107,9 +4074,9 @@
               <a:solidFill>
                 <a:schemeClr val="tx1"/>
               </a:solidFill>
-              <a:latin typeface="宋体" panose="02010600030101010101" pitchFamily="2" charset="-122"/>
-              <a:ea typeface="宋体" panose="02010600030101010101" pitchFamily="2" charset="-122"/>
-              <a:cs typeface="宋体" panose="02010600030101010101" pitchFamily="2" charset="-122"/>
+              <a:latin typeface="微软雅黑" panose="020B0503020204020204" charset="-122"/>
+              <a:ea typeface="微软雅黑" panose="020B0503020204020204" charset="-122"/>
+              <a:cs typeface="微软雅黑" panose="020B0503020204020204" charset="-122"/>
             </a:endParaRPr>
           </a:p>
         </p:txBody>
@@ -4130,8 +4097,8 @@
         </p:blipFill>
         <p:spPr>
           <a:xfrm>
-            <a:off x="2834640" y="3310890"/>
-            <a:ext cx="6522720" cy="3547110"/>
+            <a:off x="3801110" y="3408680"/>
+            <a:ext cx="6342380" cy="3449320"/>
           </a:xfrm>
           <a:prstGeom prst="rect">
             <a:avLst/>
@@ -4175,8 +4142,8 @@
         </p:blipFill>
         <p:spPr>
           <a:xfrm>
-            <a:off x="4518025" y="205740"/>
-            <a:ext cx="7722870" cy="6265545"/>
+            <a:off x="4493895" y="76200"/>
+            <a:ext cx="7820660" cy="6344920"/>
           </a:xfrm>
           <a:prstGeom prst="rect">
             <a:avLst/>
@@ -4192,7 +4159,7 @@
         <p:spPr>
           <a:xfrm>
             <a:off x="104775" y="76200"/>
-            <a:ext cx="6096000" cy="368300"/>
+            <a:ext cx="6096000" cy="398780"/>
           </a:xfrm>
           <a:prstGeom prst="rect">
             <a:avLst/>
@@ -4205,14 +4172,16 @@
           </a:bodyPr>
           <a:p>
             <a:r>
-              <a:rPr lang="en-US" altLang="zh-CN">
-                <a:latin typeface="Times New Roman" panose="02020603050405020304" charset="0"/>
+              <a:rPr lang="en-US" altLang="zh-CN" sz="2000">
+                <a:latin typeface="微软雅黑" panose="020B0503020204020204" charset="-122"/>
+                <a:ea typeface="微软雅黑" panose="020B0503020204020204" charset="-122"/>
                 <a:cs typeface="Times New Roman" panose="02020603050405020304" charset="0"/>
               </a:rPr>
               <a:t>rag_agent_template.py</a:t>
             </a:r>
-            <a:endParaRPr lang="en-US" altLang="zh-CN">
-              <a:latin typeface="Times New Roman" panose="02020603050405020304" charset="0"/>
+            <a:endParaRPr lang="en-US" altLang="zh-CN" sz="2000">
+              <a:latin typeface="微软雅黑" panose="020B0503020204020204" charset="-122"/>
+              <a:ea typeface="微软雅黑" panose="020B0503020204020204" charset="-122"/>
               <a:cs typeface="Times New Roman" panose="02020603050405020304" charset="0"/>
             </a:endParaRPr>
           </a:p>
@@ -4226,8 +4195,8 @@
         </p:nvSpPr>
         <p:spPr>
           <a:xfrm>
-            <a:off x="213995" y="847725"/>
-            <a:ext cx="4389120" cy="1476375"/>
+            <a:off x="104775" y="674370"/>
+            <a:ext cx="4389120" cy="922020"/>
           </a:xfrm>
           <a:prstGeom prst="rect">
             <a:avLst/>
@@ -4240,66 +4209,98 @@
           </a:bodyPr>
           <a:p>
             <a:r>
-              <a:rPr lang="zh-CN" altLang="en-US"/>
-              <a:t>同步与异步两种路径会先调用工具和知识检索，把得到的</a:t>
-            </a:r>
-            <a:r>
-              <a:rPr lang="en-US" altLang="zh-CN"/>
+              <a:rPr lang="zh-CN" altLang="en-US">
+                <a:latin typeface="微软雅黑" panose="020B0503020204020204" charset="-122"/>
+                <a:ea typeface="微软雅黑" panose="020B0503020204020204" charset="-122"/>
+                <a:cs typeface="微软雅黑" panose="020B0503020204020204" charset="-122"/>
+              </a:rPr>
+              <a:t>先调用工具和知识检索，把得到的</a:t>
+            </a:r>
+            <a:r>
+              <a:rPr lang="en-US" altLang="zh-CN">
+                <a:latin typeface="微软雅黑" panose="020B0503020204020204" charset="-122"/>
+                <a:ea typeface="微软雅黑" panose="020B0503020204020204" charset="-122"/>
+                <a:cs typeface="微软雅黑" panose="020B0503020204020204" charset="-122"/>
+              </a:rPr>
               <a:t> tool_res </a:t>
             </a:r>
             <a:r>
-              <a:rPr lang="zh-CN" altLang="en-US"/>
+              <a:rPr lang="zh-CN" altLang="en-US">
+                <a:latin typeface="微软雅黑" panose="020B0503020204020204" charset="-122"/>
+                <a:ea typeface="微软雅黑" panose="020B0503020204020204" charset="-122"/>
+                <a:cs typeface="微软雅黑" panose="020B0503020204020204" charset="-122"/>
+              </a:rPr>
               <a:t>与</a:t>
             </a:r>
             <a:r>
-              <a:rPr lang="en-US" altLang="zh-CN"/>
+              <a:rPr lang="en-US" altLang="zh-CN">
+                <a:latin typeface="微软雅黑" panose="020B0503020204020204" charset="-122"/>
+                <a:ea typeface="微软雅黑" panose="020B0503020204020204" charset="-122"/>
+                <a:cs typeface="微软雅黑" panose="020B0503020204020204" charset="-122"/>
+              </a:rPr>
               <a:t> knowledge_res</a:t>
             </a:r>
             <a:r>
-              <a:rPr lang="zh-CN" altLang="en-US"/>
+              <a:rPr lang="zh-CN" altLang="en-US">
+                <a:latin typeface="微软雅黑" panose="020B0503020204020204" charset="-122"/>
+                <a:ea typeface="微软雅黑" panose="020B0503020204020204" charset="-122"/>
+                <a:cs typeface="微软雅黑" panose="020B0503020204020204" charset="-122"/>
+              </a:rPr>
               <a:t>交由</a:t>
             </a:r>
             <a:r>
-              <a:rPr lang="en-US" altLang="zh-CN"/>
+              <a:rPr lang="en-US" altLang="zh-CN">
+                <a:latin typeface="微软雅黑" panose="020B0503020204020204" charset="-122"/>
+                <a:ea typeface="微软雅黑" panose="020B0503020204020204" charset="-122"/>
+                <a:cs typeface="微软雅黑" panose="020B0503020204020204" charset="-122"/>
+              </a:rPr>
               <a:t>Memory</a:t>
             </a:r>
             <a:r>
-              <a:rPr lang="zh-CN" altLang="en-US"/>
+              <a:rPr lang="zh-CN" altLang="en-US">
+                <a:latin typeface="微软雅黑" panose="020B0503020204020204" charset="-122"/>
+                <a:ea typeface="微软雅黑" panose="020B0503020204020204" charset="-122"/>
+                <a:cs typeface="微软雅黑" panose="020B0503020204020204" charset="-122"/>
+              </a:rPr>
               <a:t>、</a:t>
             </a:r>
             <a:r>
-              <a:rPr lang="en-US" altLang="zh-CN"/>
+              <a:rPr lang="en-US" altLang="zh-CN">
+                <a:latin typeface="微软雅黑" panose="020B0503020204020204" charset="-122"/>
+                <a:ea typeface="微软雅黑" panose="020B0503020204020204" charset="-122"/>
+                <a:cs typeface="微软雅黑" panose="020B0503020204020204" charset="-122"/>
+              </a:rPr>
               <a:t>LLM </a:t>
             </a:r>
             <a:r>
-              <a:rPr lang="zh-CN" altLang="en-US"/>
+              <a:rPr lang="zh-CN" altLang="en-US">
+                <a:latin typeface="微软雅黑" panose="020B0503020204020204" charset="-122"/>
+                <a:ea typeface="微软雅黑" panose="020B0503020204020204" charset="-122"/>
+                <a:cs typeface="微软雅黑" panose="020B0503020204020204" charset="-122"/>
+              </a:rPr>
               <a:t>与</a:t>
             </a:r>
             <a:r>
-              <a:rPr lang="en-US" altLang="zh-CN"/>
+              <a:rPr lang="en-US" altLang="zh-CN">
+                <a:latin typeface="微软雅黑" panose="020B0503020204020204" charset="-122"/>
+                <a:ea typeface="微软雅黑" panose="020B0503020204020204" charset="-122"/>
+                <a:cs typeface="微软雅黑" panose="020B0503020204020204" charset="-122"/>
+              </a:rPr>
               <a:t> Prompt </a:t>
             </a:r>
             <a:r>
-              <a:rPr lang="zh-CN" altLang="en-US"/>
-              <a:t>完成生成；此外</a:t>
-            </a:r>
-            <a:r>
-              <a:rPr lang="en-US" altLang="zh-CN"/>
-              <a:t>,</a:t>
-            </a:r>
-            <a:r>
-              <a:rPr lang="zh-CN" altLang="en-US"/>
-              <a:t>支持通过</a:t>
-            </a:r>
-            <a:r>
-              <a:rPr lang="en-US" altLang="zh-CN"/>
-              <a:t> AgentConfiger </a:t>
-            </a:r>
-            <a:r>
-              <a:rPr lang="zh-CN" altLang="en-US"/>
-              <a:t>初始化自身配置</a:t>
-            </a:r>
-            <a:endParaRPr lang="zh-CN" altLang="en-US"/>
+              <a:rPr lang="zh-CN" altLang="en-US">
+                <a:latin typeface="微软雅黑" panose="020B0503020204020204" charset="-122"/>
+                <a:ea typeface="微软雅黑" panose="020B0503020204020204" charset="-122"/>
+                <a:cs typeface="微软雅黑" panose="020B0503020204020204" charset="-122"/>
+              </a:rPr>
+              <a:t>完成生成</a:t>
+            </a:r>
+            <a:endParaRPr lang="zh-CN" altLang="en-US">
+              <a:latin typeface="微软雅黑" panose="020B0503020204020204" charset="-122"/>
+              <a:ea typeface="微软雅黑" panose="020B0503020204020204" charset="-122"/>
+              <a:cs typeface="微软雅黑" panose="020B0503020204020204" charset="-122"/>
+            </a:endParaRPr>
           </a:p>
         </p:txBody>
       </p:sp>
@@ -4332,6 +4333,90 @@
         </p:nvSpPr>
         <p:spPr>
           <a:xfrm>
+            <a:off x="118110" y="81280"/>
+            <a:ext cx="6096000" cy="398780"/>
+          </a:xfrm>
+          <a:prstGeom prst="rect">
+            <a:avLst/>
+          </a:prstGeom>
+          <a:noFill/>
+        </p:spPr>
+        <p:txBody>
+          <a:bodyPr wrap="square" rtlCol="0" anchor="t">
+            <a:spAutoFit/>
+          </a:bodyPr>
+          <a:p>
+            <a:r>
+              <a:rPr lang="en-US" altLang="zh-CN" sz="2000">
+                <a:latin typeface="微软雅黑" panose="020B0503020204020204" charset="-122"/>
+                <a:ea typeface="微软雅黑" panose="020B0503020204020204" charset="-122"/>
+                <a:cs typeface="微软雅黑" panose="020B0503020204020204" charset="-122"/>
+                <a:sym typeface="+mn-ea"/>
+              </a:rPr>
+              <a:t>test_rag_agent_template.py</a:t>
+            </a:r>
+            <a:endParaRPr lang="en-US" altLang="zh-CN" sz="2000">
+              <a:latin typeface="微软雅黑" panose="020B0503020204020204" charset="-122"/>
+              <a:ea typeface="微软雅黑" panose="020B0503020204020204" charset="-122"/>
+              <a:cs typeface="微软雅黑" panose="020B0503020204020204" charset="-122"/>
+              <a:sym typeface="+mn-ea"/>
+            </a:endParaRPr>
+          </a:p>
+        </p:txBody>
+      </p:sp>
+      <p:pic>
+        <p:nvPicPr>
+          <p:cNvPr id="5" name="图片 4"/>
+          <p:cNvPicPr>
+            <a:picLocks noChangeAspect="1"/>
+          </p:cNvPicPr>
+          <p:nvPr/>
+        </p:nvPicPr>
+        <p:blipFill>
+          <a:blip r:embed="rId1"/>
+          <a:stretch>
+            <a:fillRect/>
+          </a:stretch>
+        </p:blipFill>
+        <p:spPr>
+          <a:xfrm>
+            <a:off x="231140" y="541655"/>
+            <a:ext cx="6807200" cy="6212205"/>
+          </a:xfrm>
+          <a:prstGeom prst="rect">
+            <a:avLst/>
+          </a:prstGeom>
+        </p:spPr>
+      </p:pic>
+    </p:spTree>
+    <p:custDataLst>
+      <p:tags r:id="rId2"/>
+    </p:custDataLst>
+  </p:cSld>
+  <p:clrMapOvr>
+    <a:masterClrMapping/>
+  </p:clrMapOvr>
+</p:sld>
+</file>
+
+<file path=ppt/slides/slide5.xml><?xml version="1.0" encoding="utf-8"?>
+<p:sld xmlns:a="http://schemas.openxmlformats.org/drawingml/2006/main" xmlns:r="http://schemas.openxmlformats.org/officeDocument/2006/relationships" xmlns:p="http://schemas.openxmlformats.org/presentationml/2006/main">
+  <p:cSld>
+    <p:spTree>
+      <p:nvGrpSpPr>
+        <p:cNvPr id="1" name=""/>
+        <p:cNvGrpSpPr/>
+        <p:nvPr/>
+      </p:nvGrpSpPr>
+      <p:grpSpPr/>
+      <p:sp>
+        <p:nvSpPr>
+          <p:cNvPr id="4" name="文本框 3"/>
+          <p:cNvSpPr txBox="1"/>
+          <p:nvPr/>
+        </p:nvSpPr>
+        <p:spPr>
+          <a:xfrm>
             <a:off x="0" y="0"/>
             <a:ext cx="6096000" cy="368300"/>
           </a:xfrm>
@@ -4347,32 +4432,32 @@
           <a:p>
             <a:r>
               <a:rPr lang="en-US" altLang="zh-CN">
-                <a:latin typeface="Times New Roman" panose="02020603050405020304" charset="0"/>
-                <a:ea typeface="宋体" panose="02010600030101010101" pitchFamily="2" charset="-122"/>
-                <a:cs typeface="Times New Roman" panose="02020603050405020304" charset="0"/>
+                <a:latin typeface="微软雅黑" panose="020B0503020204020204" charset="-122"/>
+                <a:ea typeface="微软雅黑" panose="020B0503020204020204" charset="-122"/>
+                <a:cs typeface="微软雅黑" panose="020B0503020204020204" charset="-122"/>
               </a:rPr>
               <a:t>qwen_flash.yaml :</a:t>
             </a:r>
             <a:r>
               <a:rPr lang="zh-CN" altLang="en-US">
-                <a:latin typeface="Times New Roman" panose="02020603050405020304" charset="0"/>
-                <a:ea typeface="宋体" panose="02010600030101010101" pitchFamily="2" charset="-122"/>
-                <a:cs typeface="Times New Roman" panose="02020603050405020304" charset="0"/>
+                <a:latin typeface="微软雅黑" panose="020B0503020204020204" charset="-122"/>
+                <a:ea typeface="微软雅黑" panose="020B0503020204020204" charset="-122"/>
+                <a:cs typeface="微软雅黑" panose="020B0503020204020204" charset="-122"/>
               </a:rPr>
               <a:t>配置所用的</a:t>
             </a:r>
             <a:r>
               <a:rPr lang="en-US" altLang="zh-CN">
-                <a:latin typeface="Times New Roman" panose="02020603050405020304" charset="0"/>
-                <a:ea typeface="宋体" panose="02010600030101010101" pitchFamily="2" charset="-122"/>
-                <a:cs typeface="Times New Roman" panose="02020603050405020304" charset="0"/>
+                <a:latin typeface="微软雅黑" panose="020B0503020204020204" charset="-122"/>
+                <a:ea typeface="微软雅黑" panose="020B0503020204020204" charset="-122"/>
+                <a:cs typeface="微软雅黑" panose="020B0503020204020204" charset="-122"/>
               </a:rPr>
               <a:t>LLM</a:t>
             </a:r>
             <a:endParaRPr lang="en-US" altLang="zh-CN">
-              <a:latin typeface="Times New Roman" panose="02020603050405020304" charset="0"/>
-              <a:ea typeface="宋体" panose="02010600030101010101" pitchFamily="2" charset="-122"/>
-              <a:cs typeface="Times New Roman" panose="02020603050405020304" charset="0"/>
+              <a:latin typeface="微软雅黑" panose="020B0503020204020204" charset="-122"/>
+              <a:ea typeface="微软雅黑" panose="020B0503020204020204" charset="-122"/>
+              <a:cs typeface="微软雅黑" panose="020B0503020204020204" charset="-122"/>
             </a:endParaRPr>
           </a:p>
         </p:txBody>
@@ -4411,27 +4496,27 @@
             </a:pPr>
             <a:r>
               <a:rPr lang="zh-CN" altLang="en-US" sz="1600" b="1">
-                <a:latin typeface="宋体" panose="02010600030101010101" pitchFamily="2" charset="-122"/>
-                <a:ea typeface="宋体" panose="02010600030101010101" pitchFamily="2" charset="-122"/>
-                <a:cs typeface="宋体" panose="02010600030101010101" pitchFamily="2" charset="-122"/>
+                <a:latin typeface="微软雅黑" panose="020B0503020204020204" charset="-122"/>
+                <a:ea typeface="微软雅黑" panose="020B0503020204020204" charset="-122"/>
+                <a:cs typeface="微软雅黑" panose="020B0503020204020204" charset="-122"/>
                 <a:sym typeface="+mn-ea"/>
               </a:rPr>
               <a:t>名称（</a:t>
             </a:r>
             <a:r>
               <a:rPr lang="en-US" altLang="zh-CN" sz="1600" b="1">
-                <a:latin typeface="宋体" panose="02010600030101010101" pitchFamily="2" charset="-122"/>
-                <a:ea typeface="宋体" panose="02010600030101010101" pitchFamily="2" charset="-122"/>
-                <a:cs typeface="宋体" panose="02010600030101010101" pitchFamily="2" charset="-122"/>
+                <a:latin typeface="微软雅黑" panose="020B0503020204020204" charset="-122"/>
+                <a:ea typeface="微软雅黑" panose="020B0503020204020204" charset="-122"/>
+                <a:cs typeface="微软雅黑" panose="020B0503020204020204" charset="-122"/>
                 <a:sym typeface="+mn-ea"/>
               </a:rPr>
               <a:t>name</a:t>
             </a:r>
             <a:r>
               <a:rPr lang="zh-CN" altLang="en-US" sz="1600" b="1">
-                <a:latin typeface="宋体" panose="02010600030101010101" pitchFamily="2" charset="-122"/>
-                <a:ea typeface="宋体" panose="02010600030101010101" pitchFamily="2" charset="-122"/>
-                <a:cs typeface="宋体" panose="02010600030101010101" pitchFamily="2" charset="-122"/>
+                <a:latin typeface="微软雅黑" panose="020B0503020204020204" charset="-122"/>
+                <a:ea typeface="微软雅黑" panose="020B0503020204020204" charset="-122"/>
+                <a:cs typeface="微软雅黑" panose="020B0503020204020204" charset="-122"/>
                 <a:sym typeface="+mn-ea"/>
               </a:rPr>
               <a:t>）</a:t>
@@ -4440,9 +4525,9 @@
               <a:solidFill>
                 <a:schemeClr val="tx1"/>
               </a:solidFill>
-              <a:latin typeface="宋体" panose="02010600030101010101" pitchFamily="2" charset="-122"/>
-              <a:ea typeface="宋体" panose="02010600030101010101" pitchFamily="2" charset="-122"/>
-              <a:cs typeface="宋体" panose="02010600030101010101" pitchFamily="2" charset="-122"/>
+              <a:latin typeface="微软雅黑" panose="020B0503020204020204" charset="-122"/>
+              <a:ea typeface="微软雅黑" panose="020B0503020204020204" charset="-122"/>
+              <a:cs typeface="微软雅黑" panose="020B0503020204020204" charset="-122"/>
             </a:endParaRPr>
           </a:p>
           <a:p>
@@ -4459,17 +4544,17 @@
             </a:pPr>
             <a:r>
               <a:rPr lang="zh-CN" altLang="en-US" sz="1600">
-                <a:latin typeface="宋体" panose="02010600030101010101" pitchFamily="2" charset="-122"/>
-                <a:ea typeface="宋体" panose="02010600030101010101" pitchFamily="2" charset="-122"/>
-                <a:cs typeface="宋体" panose="02010600030101010101" pitchFamily="2" charset="-122"/>
+                <a:latin typeface="微软雅黑" panose="020B0503020204020204" charset="-122"/>
+                <a:ea typeface="微软雅黑" panose="020B0503020204020204" charset="-122"/>
+                <a:cs typeface="微软雅黑" panose="020B0503020204020204" charset="-122"/>
                 <a:sym typeface="+mn-ea"/>
               </a:rPr>
               <a:t>模型在系统中的唯一标识</a:t>
             </a:r>
             <a:endParaRPr lang="zh-CN" altLang="en-US" sz="1600">
-              <a:latin typeface="宋体" panose="02010600030101010101" pitchFamily="2" charset="-122"/>
-              <a:ea typeface="宋体" panose="02010600030101010101" pitchFamily="2" charset="-122"/>
-              <a:cs typeface="宋体" panose="02010600030101010101" pitchFamily="2" charset="-122"/>
+              <a:latin typeface="微软雅黑" panose="020B0503020204020204" charset="-122"/>
+              <a:ea typeface="微软雅黑" panose="020B0503020204020204" charset="-122"/>
+              <a:cs typeface="微软雅黑" panose="020B0503020204020204" charset="-122"/>
               <a:sym typeface="+mn-ea"/>
             </a:endParaRPr>
           </a:p>
@@ -4487,27 +4572,27 @@
             </a:pPr>
             <a:r>
               <a:rPr lang="zh-CN" altLang="en-US" sz="1600" b="1">
-                <a:latin typeface="宋体" panose="02010600030101010101" pitchFamily="2" charset="-122"/>
-                <a:ea typeface="宋体" panose="02010600030101010101" pitchFamily="2" charset="-122"/>
-                <a:cs typeface="宋体" panose="02010600030101010101" pitchFamily="2" charset="-122"/>
+                <a:latin typeface="微软雅黑" panose="020B0503020204020204" charset="-122"/>
+                <a:ea typeface="微软雅黑" panose="020B0503020204020204" charset="-122"/>
+                <a:cs typeface="微软雅黑" panose="020B0503020204020204" charset="-122"/>
                 <a:sym typeface="+mn-ea"/>
               </a:rPr>
               <a:t>介绍（</a:t>
             </a:r>
             <a:r>
               <a:rPr lang="en-US" altLang="zh-CN" sz="1600" b="1">
-                <a:latin typeface="宋体" panose="02010600030101010101" pitchFamily="2" charset="-122"/>
-                <a:ea typeface="宋体" panose="02010600030101010101" pitchFamily="2" charset="-122"/>
-                <a:cs typeface="宋体" panose="02010600030101010101" pitchFamily="2" charset="-122"/>
+                <a:latin typeface="微软雅黑" panose="020B0503020204020204" charset="-122"/>
+                <a:ea typeface="微软雅黑" panose="020B0503020204020204" charset="-122"/>
+                <a:cs typeface="微软雅黑" panose="020B0503020204020204" charset="-122"/>
                 <a:sym typeface="+mn-ea"/>
               </a:rPr>
               <a:t>description</a:t>
             </a:r>
             <a:r>
               <a:rPr lang="zh-CN" altLang="en-US" sz="1600" b="1">
-                <a:latin typeface="宋体" panose="02010600030101010101" pitchFamily="2" charset="-122"/>
-                <a:ea typeface="宋体" panose="02010600030101010101" pitchFamily="2" charset="-122"/>
-                <a:cs typeface="宋体" panose="02010600030101010101" pitchFamily="2" charset="-122"/>
+                <a:latin typeface="微软雅黑" panose="020B0503020204020204" charset="-122"/>
+                <a:ea typeface="微软雅黑" panose="020B0503020204020204" charset="-122"/>
+                <a:cs typeface="微软雅黑" panose="020B0503020204020204" charset="-122"/>
                 <a:sym typeface="+mn-ea"/>
               </a:rPr>
               <a:t>）</a:t>
@@ -4516,9 +4601,9 @@
               <a:solidFill>
                 <a:schemeClr val="tx1"/>
               </a:solidFill>
-              <a:latin typeface="宋体" panose="02010600030101010101" pitchFamily="2" charset="-122"/>
-              <a:ea typeface="宋体" panose="02010600030101010101" pitchFamily="2" charset="-122"/>
-              <a:cs typeface="宋体" panose="02010600030101010101" pitchFamily="2" charset="-122"/>
+              <a:latin typeface="微软雅黑" panose="020B0503020204020204" charset="-122"/>
+              <a:ea typeface="微软雅黑" panose="020B0503020204020204" charset="-122"/>
+              <a:cs typeface="微软雅黑" panose="020B0503020204020204" charset="-122"/>
             </a:endParaRPr>
           </a:p>
           <a:p>
@@ -4535,17 +4620,17 @@
             </a:pPr>
             <a:r>
               <a:rPr lang="zh-CN" altLang="en-US" sz="1600">
-                <a:latin typeface="宋体" panose="02010600030101010101" pitchFamily="2" charset="-122"/>
-                <a:ea typeface="宋体" panose="02010600030101010101" pitchFamily="2" charset="-122"/>
-                <a:cs typeface="宋体" panose="02010600030101010101" pitchFamily="2" charset="-122"/>
+                <a:latin typeface="微软雅黑" panose="020B0503020204020204" charset="-122"/>
+                <a:ea typeface="微软雅黑" panose="020B0503020204020204" charset="-122"/>
+                <a:cs typeface="微软雅黑" panose="020B0503020204020204" charset="-122"/>
                 <a:sym typeface="+mn-ea"/>
               </a:rPr>
               <a:t>模型的简要描述</a:t>
             </a:r>
             <a:endParaRPr lang="zh-CN" altLang="en-US" sz="1600">
-              <a:latin typeface="宋体" panose="02010600030101010101" pitchFamily="2" charset="-122"/>
-              <a:ea typeface="宋体" panose="02010600030101010101" pitchFamily="2" charset="-122"/>
-              <a:cs typeface="宋体" panose="02010600030101010101" pitchFamily="2" charset="-122"/>
+              <a:latin typeface="微软雅黑" panose="020B0503020204020204" charset="-122"/>
+              <a:ea typeface="微软雅黑" panose="020B0503020204020204" charset="-122"/>
+              <a:cs typeface="微软雅黑" panose="020B0503020204020204" charset="-122"/>
               <a:sym typeface="+mn-ea"/>
             </a:endParaRPr>
           </a:p>
@@ -4563,27 +4648,27 @@
             </a:pPr>
             <a:r>
               <a:rPr lang="zh-CN" altLang="en-US" sz="1600" b="1">
-                <a:latin typeface="宋体" panose="02010600030101010101" pitchFamily="2" charset="-122"/>
-                <a:ea typeface="宋体" panose="02010600030101010101" pitchFamily="2" charset="-122"/>
-                <a:cs typeface="宋体" panose="02010600030101010101" pitchFamily="2" charset="-122"/>
+                <a:latin typeface="微软雅黑" panose="020B0503020204020204" charset="-122"/>
+                <a:ea typeface="微软雅黑" panose="020B0503020204020204" charset="-122"/>
+                <a:cs typeface="微软雅黑" panose="020B0503020204020204" charset="-122"/>
                 <a:sym typeface="+mn-ea"/>
               </a:rPr>
               <a:t>模型名称（</a:t>
             </a:r>
             <a:r>
               <a:rPr lang="en-US" altLang="zh-CN" sz="1600" b="1">
-                <a:latin typeface="宋体" panose="02010600030101010101" pitchFamily="2" charset="-122"/>
-                <a:ea typeface="宋体" panose="02010600030101010101" pitchFamily="2" charset="-122"/>
-                <a:cs typeface="宋体" panose="02010600030101010101" pitchFamily="2" charset="-122"/>
+                <a:latin typeface="微软雅黑" panose="020B0503020204020204" charset="-122"/>
+                <a:ea typeface="微软雅黑" panose="020B0503020204020204" charset="-122"/>
+                <a:cs typeface="微软雅黑" panose="020B0503020204020204" charset="-122"/>
                 <a:sym typeface="+mn-ea"/>
               </a:rPr>
               <a:t>model_name</a:t>
             </a:r>
             <a:r>
               <a:rPr lang="zh-CN" altLang="en-US" sz="1600" b="1">
-                <a:latin typeface="宋体" panose="02010600030101010101" pitchFamily="2" charset="-122"/>
-                <a:ea typeface="宋体" panose="02010600030101010101" pitchFamily="2" charset="-122"/>
-                <a:cs typeface="宋体" panose="02010600030101010101" pitchFamily="2" charset="-122"/>
+                <a:latin typeface="微软雅黑" panose="020B0503020204020204" charset="-122"/>
+                <a:ea typeface="微软雅黑" panose="020B0503020204020204" charset="-122"/>
+                <a:cs typeface="微软雅黑" panose="020B0503020204020204" charset="-122"/>
                 <a:sym typeface="+mn-ea"/>
               </a:rPr>
               <a:t>）</a:t>
@@ -4592,9 +4677,9 @@
               <a:solidFill>
                 <a:schemeClr val="tx1"/>
               </a:solidFill>
-              <a:latin typeface="宋体" panose="02010600030101010101" pitchFamily="2" charset="-122"/>
-              <a:ea typeface="宋体" panose="02010600030101010101" pitchFamily="2" charset="-122"/>
-              <a:cs typeface="宋体" panose="02010600030101010101" pitchFamily="2" charset="-122"/>
+              <a:latin typeface="微软雅黑" panose="020B0503020204020204" charset="-122"/>
+              <a:ea typeface="微软雅黑" panose="020B0503020204020204" charset="-122"/>
+              <a:cs typeface="微软雅黑" panose="020B0503020204020204" charset="-122"/>
             </a:endParaRPr>
           </a:p>
           <a:p>
@@ -4611,17 +4696,17 @@
             </a:pPr>
             <a:r>
               <a:rPr lang="zh-CN" altLang="en-US" sz="1600">
-                <a:latin typeface="宋体" panose="02010600030101010101" pitchFamily="2" charset="-122"/>
-                <a:ea typeface="宋体" panose="02010600030101010101" pitchFamily="2" charset="-122"/>
-                <a:cs typeface="宋体" panose="02010600030101010101" pitchFamily="2" charset="-122"/>
+                <a:latin typeface="微软雅黑" panose="020B0503020204020204" charset="-122"/>
+                <a:ea typeface="微软雅黑" panose="020B0503020204020204" charset="-122"/>
+                <a:cs typeface="微软雅黑" panose="020B0503020204020204" charset="-122"/>
                 <a:sym typeface="+mn-ea"/>
               </a:rPr>
               <a:t>对应阿里百炼平台中实际调用的模型名称</a:t>
             </a:r>
             <a:endParaRPr lang="zh-CN" altLang="en-US" sz="1600">
-              <a:latin typeface="宋体" panose="02010600030101010101" pitchFamily="2" charset="-122"/>
-              <a:ea typeface="宋体" panose="02010600030101010101" pitchFamily="2" charset="-122"/>
-              <a:cs typeface="宋体" panose="02010600030101010101" pitchFamily="2" charset="-122"/>
+              <a:latin typeface="微软雅黑" panose="020B0503020204020204" charset="-122"/>
+              <a:ea typeface="微软雅黑" panose="020B0503020204020204" charset="-122"/>
+              <a:cs typeface="微软雅黑" panose="020B0503020204020204" charset="-122"/>
               <a:sym typeface="+mn-ea"/>
             </a:endParaRPr>
           </a:p>
@@ -4639,45 +4724,45 @@
             </a:pPr>
             <a:r>
               <a:rPr lang="zh-CN" altLang="en-US" sz="1600" b="1">
-                <a:latin typeface="宋体" panose="02010600030101010101" pitchFamily="2" charset="-122"/>
-                <a:ea typeface="宋体" panose="02010600030101010101" pitchFamily="2" charset="-122"/>
-                <a:cs typeface="宋体" panose="02010600030101010101" pitchFamily="2" charset="-122"/>
+                <a:latin typeface="微软雅黑" panose="020B0503020204020204" charset="-122"/>
+                <a:ea typeface="微软雅黑" panose="020B0503020204020204" charset="-122"/>
+                <a:cs typeface="微软雅黑" panose="020B0503020204020204" charset="-122"/>
                 <a:sym typeface="+mn-ea"/>
               </a:rPr>
               <a:t>最大</a:t>
             </a:r>
             <a:r>
               <a:rPr lang="en-US" altLang="zh-CN" sz="1600" b="1">
-                <a:latin typeface="宋体" panose="02010600030101010101" pitchFamily="2" charset="-122"/>
-                <a:ea typeface="宋体" panose="02010600030101010101" pitchFamily="2" charset="-122"/>
-                <a:cs typeface="宋体" panose="02010600030101010101" pitchFamily="2" charset="-122"/>
+                <a:latin typeface="微软雅黑" panose="020B0503020204020204" charset="-122"/>
+                <a:ea typeface="微软雅黑" panose="020B0503020204020204" charset="-122"/>
+                <a:cs typeface="微软雅黑" panose="020B0503020204020204" charset="-122"/>
                 <a:sym typeface="+mn-ea"/>
               </a:rPr>
               <a:t>token</a:t>
             </a:r>
             <a:r>
               <a:rPr lang="zh-CN" altLang="en-US" sz="1600" b="1">
-                <a:latin typeface="宋体" panose="02010600030101010101" pitchFamily="2" charset="-122"/>
-                <a:ea typeface="宋体" panose="02010600030101010101" pitchFamily="2" charset="-122"/>
-                <a:cs typeface="宋体" panose="02010600030101010101" pitchFamily="2" charset="-122"/>
+                <a:latin typeface="微软雅黑" panose="020B0503020204020204" charset="-122"/>
+                <a:ea typeface="微软雅黑" panose="020B0503020204020204" charset="-122"/>
+                <a:cs typeface="微软雅黑" panose="020B0503020204020204" charset="-122"/>
                 <a:sym typeface="+mn-ea"/>
               </a:rPr>
               <a:t>（</a:t>
             </a:r>
             <a:r>
               <a:rPr lang="en-US" altLang="zh-CN" sz="1600" b="1">
-                <a:latin typeface="宋体" panose="02010600030101010101" pitchFamily="2" charset="-122"/>
-                <a:ea typeface="宋体" panose="02010600030101010101" pitchFamily="2" charset="-122"/>
-                <a:cs typeface="宋体" panose="02010600030101010101" pitchFamily="2" charset="-122"/>
+                <a:latin typeface="微软雅黑" panose="020B0503020204020204" charset="-122"/>
+                <a:ea typeface="微软雅黑" panose="020B0503020204020204" charset="-122"/>
+                <a:cs typeface="微软雅黑" panose="020B0503020204020204" charset="-122"/>
                 <a:sym typeface="+mn-ea"/>
               </a:rPr>
               <a:t>max_tokens</a:t>
             </a:r>
             <a:r>
               <a:rPr lang="zh-CN" altLang="en-US" sz="1600" b="1">
-                <a:latin typeface="宋体" panose="02010600030101010101" pitchFamily="2" charset="-122"/>
-                <a:ea typeface="宋体" panose="02010600030101010101" pitchFamily="2" charset="-122"/>
-                <a:cs typeface="宋体" panose="02010600030101010101" pitchFamily="2" charset="-122"/>
+                <a:latin typeface="微软雅黑" panose="020B0503020204020204" charset="-122"/>
+                <a:ea typeface="微软雅黑" panose="020B0503020204020204" charset="-122"/>
+                <a:cs typeface="微软雅黑" panose="020B0503020204020204" charset="-122"/>
                 <a:sym typeface="+mn-ea"/>
               </a:rPr>
               <a:t>）</a:t>
@@ -4686,9 +4771,9 @@
               <a:solidFill>
                 <a:schemeClr val="tx1"/>
               </a:solidFill>
-              <a:latin typeface="宋体" panose="02010600030101010101" pitchFamily="2" charset="-122"/>
-              <a:ea typeface="宋体" panose="02010600030101010101" pitchFamily="2" charset="-122"/>
-              <a:cs typeface="宋体" panose="02010600030101010101" pitchFamily="2" charset="-122"/>
+              <a:latin typeface="微软雅黑" panose="020B0503020204020204" charset="-122"/>
+              <a:ea typeface="微软雅黑" panose="020B0503020204020204" charset="-122"/>
+              <a:cs typeface="微软雅黑" panose="020B0503020204020204" charset="-122"/>
             </a:endParaRPr>
           </a:p>
           <a:p>
@@ -4705,35 +4790,35 @@
             </a:pPr>
             <a:r>
               <a:rPr lang="zh-CN" altLang="en-US" sz="1600">
-                <a:latin typeface="宋体" panose="02010600030101010101" pitchFamily="2" charset="-122"/>
-                <a:ea typeface="宋体" panose="02010600030101010101" pitchFamily="2" charset="-122"/>
-                <a:cs typeface="宋体" panose="02010600030101010101" pitchFamily="2" charset="-122"/>
+                <a:latin typeface="微软雅黑" panose="020B0503020204020204" charset="-122"/>
+                <a:ea typeface="微软雅黑" panose="020B0503020204020204" charset="-122"/>
+                <a:cs typeface="微软雅黑" panose="020B0503020204020204" charset="-122"/>
                 <a:sym typeface="+mn-ea"/>
               </a:rPr>
               <a:t>模型单次生成的最大</a:t>
             </a:r>
             <a:r>
               <a:rPr lang="en-US" altLang="zh-CN" sz="1600">
-                <a:latin typeface="宋体" panose="02010600030101010101" pitchFamily="2" charset="-122"/>
-                <a:ea typeface="宋体" panose="02010600030101010101" pitchFamily="2" charset="-122"/>
-                <a:cs typeface="宋体" panose="02010600030101010101" pitchFamily="2" charset="-122"/>
+                <a:latin typeface="微软雅黑" panose="020B0503020204020204" charset="-122"/>
+                <a:ea typeface="微软雅黑" panose="020B0503020204020204" charset="-122"/>
+                <a:cs typeface="微软雅黑" panose="020B0503020204020204" charset="-122"/>
                 <a:sym typeface="+mn-ea"/>
               </a:rPr>
               <a:t>token</a:t>
             </a:r>
             <a:r>
               <a:rPr lang="zh-CN" altLang="en-US" sz="1600">
-                <a:latin typeface="宋体" panose="02010600030101010101" pitchFamily="2" charset="-122"/>
-                <a:ea typeface="宋体" panose="02010600030101010101" pitchFamily="2" charset="-122"/>
-                <a:cs typeface="宋体" panose="02010600030101010101" pitchFamily="2" charset="-122"/>
+                <a:latin typeface="微软雅黑" panose="020B0503020204020204" charset="-122"/>
+                <a:ea typeface="微软雅黑" panose="020B0503020204020204" charset="-122"/>
+                <a:cs typeface="微软雅黑" panose="020B0503020204020204" charset="-122"/>
                 <a:sym typeface="+mn-ea"/>
               </a:rPr>
               <a:t>数量</a:t>
             </a:r>
             <a:endParaRPr lang="zh-CN" altLang="en-US" sz="1600">
-              <a:latin typeface="宋体" panose="02010600030101010101" pitchFamily="2" charset="-122"/>
-              <a:ea typeface="宋体" panose="02010600030101010101" pitchFamily="2" charset="-122"/>
-              <a:cs typeface="宋体" panose="02010600030101010101" pitchFamily="2" charset="-122"/>
+              <a:latin typeface="微软雅黑" panose="020B0503020204020204" charset="-122"/>
+              <a:ea typeface="微软雅黑" panose="020B0503020204020204" charset="-122"/>
+              <a:cs typeface="微软雅黑" panose="020B0503020204020204" charset="-122"/>
               <a:sym typeface="+mn-ea"/>
             </a:endParaRPr>
           </a:p>
@@ -4751,36 +4836,36 @@
             </a:pPr>
             <a:r>
               <a:rPr lang="en-US" altLang="zh-CN" sz="1600" b="1">
-                <a:latin typeface="宋体" panose="02010600030101010101" pitchFamily="2" charset="-122"/>
-                <a:ea typeface="宋体" panose="02010600030101010101" pitchFamily="2" charset="-122"/>
-                <a:cs typeface="宋体" panose="02010600030101010101" pitchFamily="2" charset="-122"/>
+                <a:latin typeface="微软雅黑" panose="020B0503020204020204" charset="-122"/>
+                <a:ea typeface="微软雅黑" panose="020B0503020204020204" charset="-122"/>
+                <a:cs typeface="微软雅黑" panose="020B0503020204020204" charset="-122"/>
                 <a:sym typeface="+mn-ea"/>
               </a:rPr>
               <a:t>api</a:t>
             </a:r>
             <a:r>
               <a:rPr lang="zh-CN" altLang="en-US" sz="1600" b="1">
-                <a:latin typeface="宋体" panose="02010600030101010101" pitchFamily="2" charset="-122"/>
-                <a:ea typeface="宋体" panose="02010600030101010101" pitchFamily="2" charset="-122"/>
-                <a:cs typeface="宋体" panose="02010600030101010101" pitchFamily="2" charset="-122"/>
+                <a:latin typeface="微软雅黑" panose="020B0503020204020204" charset="-122"/>
+                <a:ea typeface="微软雅黑" panose="020B0503020204020204" charset="-122"/>
+                <a:cs typeface="微软雅黑" panose="020B0503020204020204" charset="-122"/>
                 <a:sym typeface="+mn-ea"/>
               </a:rPr>
               <a:t>密钥（</a:t>
             </a:r>
             <a:r>
               <a:rPr lang="en-US" altLang="zh-CN" sz="1600" b="1">
-                <a:latin typeface="宋体" panose="02010600030101010101" pitchFamily="2" charset="-122"/>
-                <a:ea typeface="宋体" panose="02010600030101010101" pitchFamily="2" charset="-122"/>
-                <a:cs typeface="宋体" panose="02010600030101010101" pitchFamily="2" charset="-122"/>
+                <a:latin typeface="微软雅黑" panose="020B0503020204020204" charset="-122"/>
+                <a:ea typeface="微软雅黑" panose="020B0503020204020204" charset="-122"/>
+                <a:cs typeface="微软雅黑" panose="020B0503020204020204" charset="-122"/>
                 <a:sym typeface="+mn-ea"/>
               </a:rPr>
               <a:t>api_key</a:t>
             </a:r>
             <a:r>
               <a:rPr lang="zh-CN" altLang="en-US" sz="1600" b="1">
-                <a:latin typeface="宋体" panose="02010600030101010101" pitchFamily="2" charset="-122"/>
-                <a:ea typeface="宋体" panose="02010600030101010101" pitchFamily="2" charset="-122"/>
-                <a:cs typeface="宋体" panose="02010600030101010101" pitchFamily="2" charset="-122"/>
+                <a:latin typeface="微软雅黑" panose="020B0503020204020204" charset="-122"/>
+                <a:ea typeface="微软雅黑" panose="020B0503020204020204" charset="-122"/>
+                <a:cs typeface="微软雅黑" panose="020B0503020204020204" charset="-122"/>
                 <a:sym typeface="+mn-ea"/>
               </a:rPr>
               <a:t>）</a:t>
@@ -4789,9 +4874,9 @@
               <a:solidFill>
                 <a:schemeClr val="tx1"/>
               </a:solidFill>
-              <a:latin typeface="宋体" panose="02010600030101010101" pitchFamily="2" charset="-122"/>
-              <a:ea typeface="宋体" panose="02010600030101010101" pitchFamily="2" charset="-122"/>
-              <a:cs typeface="宋体" panose="02010600030101010101" pitchFamily="2" charset="-122"/>
+              <a:latin typeface="微软雅黑" panose="020B0503020204020204" charset="-122"/>
+              <a:ea typeface="微软雅黑" panose="020B0503020204020204" charset="-122"/>
+              <a:cs typeface="微软雅黑" panose="020B0503020204020204" charset="-122"/>
             </a:endParaRPr>
           </a:p>
           <a:p>
@@ -4808,35 +4893,35 @@
             </a:pPr>
             <a:r>
               <a:rPr lang="zh-CN" altLang="en-US" sz="1600">
-                <a:latin typeface="宋体" panose="02010600030101010101" pitchFamily="2" charset="-122"/>
-                <a:ea typeface="宋体" panose="02010600030101010101" pitchFamily="2" charset="-122"/>
-                <a:cs typeface="宋体" panose="02010600030101010101" pitchFamily="2" charset="-122"/>
+                <a:latin typeface="微软雅黑" panose="020B0503020204020204" charset="-122"/>
+                <a:ea typeface="微软雅黑" panose="020B0503020204020204" charset="-122"/>
+                <a:cs typeface="微软雅黑" panose="020B0503020204020204" charset="-122"/>
                 <a:sym typeface="+mn-ea"/>
               </a:rPr>
               <a:t>阿里云百炼平台的</a:t>
             </a:r>
             <a:r>
               <a:rPr lang="en-US" altLang="zh-CN" sz="1600">
-                <a:latin typeface="宋体" panose="02010600030101010101" pitchFamily="2" charset="-122"/>
-                <a:ea typeface="宋体" panose="02010600030101010101" pitchFamily="2" charset="-122"/>
-                <a:cs typeface="宋体" panose="02010600030101010101" pitchFamily="2" charset="-122"/>
+                <a:latin typeface="微软雅黑" panose="020B0503020204020204" charset="-122"/>
+                <a:ea typeface="微软雅黑" panose="020B0503020204020204" charset="-122"/>
+                <a:cs typeface="微软雅黑" panose="020B0503020204020204" charset="-122"/>
                 <a:sym typeface="+mn-ea"/>
               </a:rPr>
               <a:t>API</a:t>
             </a:r>
             <a:r>
               <a:rPr lang="zh-CN" altLang="en-US" sz="1600">
-                <a:latin typeface="宋体" panose="02010600030101010101" pitchFamily="2" charset="-122"/>
-                <a:ea typeface="宋体" panose="02010600030101010101" pitchFamily="2" charset="-122"/>
-                <a:cs typeface="宋体" panose="02010600030101010101" pitchFamily="2" charset="-122"/>
+                <a:latin typeface="微软雅黑" panose="020B0503020204020204" charset="-122"/>
+                <a:ea typeface="微软雅黑" panose="020B0503020204020204" charset="-122"/>
+                <a:cs typeface="微软雅黑" panose="020B0503020204020204" charset="-122"/>
                 <a:sym typeface="+mn-ea"/>
               </a:rPr>
               <a:t>密钥</a:t>
             </a:r>
             <a:endParaRPr lang="zh-CN" altLang="en-US" sz="1600">
-              <a:latin typeface="宋体" panose="02010600030101010101" pitchFamily="2" charset="-122"/>
-              <a:ea typeface="宋体" panose="02010600030101010101" pitchFamily="2" charset="-122"/>
-              <a:cs typeface="宋体" panose="02010600030101010101" pitchFamily="2" charset="-122"/>
+              <a:latin typeface="微软雅黑" panose="020B0503020204020204" charset="-122"/>
+              <a:ea typeface="微软雅黑" panose="020B0503020204020204" charset="-122"/>
+              <a:cs typeface="微软雅黑" panose="020B0503020204020204" charset="-122"/>
               <a:sym typeface="+mn-ea"/>
             </a:endParaRPr>
           </a:p>
@@ -4854,44 +4939,35 @@
             </a:pPr>
             <a:r>
               <a:rPr lang="zh-CN" altLang="en-US" sz="1600" b="1">
-                <a:latin typeface="宋体" panose="02010600030101010101" pitchFamily="2" charset="-122"/>
-                <a:ea typeface="宋体" panose="02010600030101010101" pitchFamily="2" charset="-122"/>
-                <a:cs typeface="宋体" panose="02010600030101010101" pitchFamily="2" charset="-122"/>
+                <a:latin typeface="微软雅黑" panose="020B0503020204020204" charset="-122"/>
+                <a:ea typeface="微软雅黑" panose="020B0503020204020204" charset="-122"/>
+                <a:cs typeface="微软雅黑" panose="020B0503020204020204" charset="-122"/>
                 <a:sym typeface="+mn-ea"/>
               </a:rPr>
-              <a:t>元数据</a:t>
+              <a:t>元数据（</a:t>
+            </a:r>
+            <a:r>
+              <a:rPr lang="en-US" altLang="zh-CN" sz="1600" b="1">
+                <a:latin typeface="微软雅黑" panose="020B0503020204020204" charset="-122"/>
+                <a:ea typeface="微软雅黑" panose="020B0503020204020204" charset="-122"/>
+                <a:cs typeface="微软雅黑" panose="020B0503020204020204" charset="-122"/>
+                <a:sym typeface="+mn-ea"/>
+              </a:rPr>
+              <a:t>metadata</a:t>
             </a:r>
             <a:r>
               <a:rPr lang="zh-CN" altLang="en-US" sz="1600" b="1">
-                <a:latin typeface="宋体" panose="02010600030101010101" pitchFamily="2" charset="-122"/>
-                <a:ea typeface="宋体" panose="02010600030101010101" pitchFamily="2" charset="-122"/>
-                <a:cs typeface="宋体" panose="02010600030101010101" pitchFamily="2" charset="-122"/>
+                <a:latin typeface="微软雅黑" panose="020B0503020204020204" charset="-122"/>
+                <a:ea typeface="微软雅黑" panose="020B0503020204020204" charset="-122"/>
+                <a:cs typeface="微软雅黑" panose="020B0503020204020204" charset="-122"/>
                 <a:sym typeface="+mn-ea"/>
               </a:rPr>
-              <a:t>（</a:t>
-            </a:r>
-            <a:r>
-              <a:rPr lang="en-US" altLang="zh-CN" sz="1600" b="1">
-                <a:latin typeface="宋体" panose="02010600030101010101" pitchFamily="2" charset="-122"/>
-                <a:ea typeface="宋体" panose="02010600030101010101" pitchFamily="2" charset="-122"/>
-                <a:cs typeface="宋体" panose="02010600030101010101" pitchFamily="2" charset="-122"/>
-                <a:sym typeface="+mn-ea"/>
-              </a:rPr>
-              <a:t>metadata</a:t>
-            </a:r>
-            <a:r>
-              <a:rPr lang="zh-CN" altLang="en-US" sz="1600" b="1">
-                <a:latin typeface="宋体" panose="02010600030101010101" pitchFamily="2" charset="-122"/>
-                <a:ea typeface="宋体" panose="02010600030101010101" pitchFamily="2" charset="-122"/>
-                <a:cs typeface="宋体" panose="02010600030101010101" pitchFamily="2" charset="-122"/>
-                <a:sym typeface="+mn-ea"/>
-              </a:rPr>
               <a:t>）</a:t>
             </a:r>
             <a:endParaRPr lang="zh-CN" altLang="en-US" sz="1600" b="1">
-              <a:latin typeface="宋体" panose="02010600030101010101" pitchFamily="2" charset="-122"/>
-              <a:ea typeface="宋体" panose="02010600030101010101" pitchFamily="2" charset="-122"/>
-              <a:cs typeface="宋体" panose="02010600030101010101" pitchFamily="2" charset="-122"/>
+              <a:latin typeface="微软雅黑" panose="020B0503020204020204" charset="-122"/>
+              <a:ea typeface="微软雅黑" panose="020B0503020204020204" charset="-122"/>
+              <a:cs typeface="微软雅黑" panose="020B0503020204020204" charset="-122"/>
               <a:sym typeface="+mn-ea"/>
             </a:endParaRPr>
           </a:p>
@@ -4909,44 +4985,44 @@
             </a:pPr>
             <a:r>
               <a:rPr lang="zh-CN" altLang="en-US" sz="1600">
-                <a:latin typeface="宋体" panose="02010600030101010101" pitchFamily="2" charset="-122"/>
-                <a:ea typeface="宋体" panose="02010600030101010101" pitchFamily="2" charset="-122"/>
-                <a:cs typeface="宋体" panose="02010600030101010101" pitchFamily="2" charset="-122"/>
+                <a:latin typeface="微软雅黑" panose="020B0503020204020204" charset="-122"/>
+                <a:ea typeface="微软雅黑" panose="020B0503020204020204" charset="-122"/>
+                <a:cs typeface="微软雅黑" panose="020B0503020204020204" charset="-122"/>
                 <a:sym typeface="+mn-ea"/>
               </a:rPr>
               <a:t>指定实现该模型的</a:t>
             </a:r>
             <a:r>
               <a:rPr lang="en-US" altLang="zh-CN" sz="1600">
-                <a:latin typeface="宋体" panose="02010600030101010101" pitchFamily="2" charset="-122"/>
-                <a:ea typeface="宋体" panose="02010600030101010101" pitchFamily="2" charset="-122"/>
-                <a:cs typeface="宋体" panose="02010600030101010101" pitchFamily="2" charset="-122"/>
+                <a:latin typeface="微软雅黑" panose="020B0503020204020204" charset="-122"/>
+                <a:ea typeface="微软雅黑" panose="020B0503020204020204" charset="-122"/>
+                <a:cs typeface="微软雅黑" panose="020B0503020204020204" charset="-122"/>
                 <a:sym typeface="+mn-ea"/>
               </a:rPr>
               <a:t>Python</a:t>
             </a:r>
             <a:r>
               <a:rPr lang="zh-CN" altLang="en-US" sz="1600">
-                <a:latin typeface="宋体" panose="02010600030101010101" pitchFamily="2" charset="-122"/>
-                <a:ea typeface="宋体" panose="02010600030101010101" pitchFamily="2" charset="-122"/>
-                <a:cs typeface="宋体" panose="02010600030101010101" pitchFamily="2" charset="-122"/>
+                <a:latin typeface="微软雅黑" panose="020B0503020204020204" charset="-122"/>
+                <a:ea typeface="微软雅黑" panose="020B0503020204020204" charset="-122"/>
+                <a:cs typeface="微软雅黑" panose="020B0503020204020204" charset="-122"/>
                 <a:sym typeface="+mn-ea"/>
               </a:rPr>
               <a:t>模块路径</a:t>
             </a:r>
             <a:r>
               <a:rPr lang="zh-CN" altLang="en-US" sz="1600">
-                <a:latin typeface="宋体" panose="02010600030101010101" pitchFamily="2" charset="-122"/>
-                <a:ea typeface="宋体" panose="02010600030101010101" pitchFamily="2" charset="-122"/>
-                <a:cs typeface="宋体" panose="02010600030101010101" pitchFamily="2" charset="-122"/>
+                <a:latin typeface="微软雅黑" panose="020B0503020204020204" charset="-122"/>
+                <a:ea typeface="微软雅黑" panose="020B0503020204020204" charset="-122"/>
+                <a:cs typeface="微软雅黑" panose="020B0503020204020204" charset="-122"/>
                 <a:sym typeface="+mn-ea"/>
               </a:rPr>
               <a:t>以及指定具体的实现类</a:t>
             </a:r>
             <a:endParaRPr lang="zh-CN" altLang="en-US" sz="1600">
-              <a:latin typeface="宋体" panose="02010600030101010101" pitchFamily="2" charset="-122"/>
-              <a:ea typeface="宋体" panose="02010600030101010101" pitchFamily="2" charset="-122"/>
-              <a:cs typeface="宋体" panose="02010600030101010101" pitchFamily="2" charset="-122"/>
+              <a:latin typeface="微软雅黑" panose="020B0503020204020204" charset="-122"/>
+              <a:ea typeface="微软雅黑" panose="020B0503020204020204" charset="-122"/>
+              <a:cs typeface="微软雅黑" panose="020B0503020204020204" charset="-122"/>
               <a:sym typeface="+mn-ea"/>
             </a:endParaRPr>
           </a:p>
@@ -4968,7 +5044,7 @@
         </p:blipFill>
         <p:spPr>
           <a:xfrm>
-            <a:off x="6316980" y="436245"/>
+            <a:off x="6439535" y="681355"/>
             <a:ext cx="4196715" cy="2901315"/>
           </a:xfrm>
           <a:prstGeom prst="rect">
@@ -4987,7 +5063,7 @@
 </p:sld>
 </file>
 
-<file path=ppt/slides/slide5.xml><?xml version="1.0" encoding="utf-8"?>
+<file path=ppt/slides/slide6.xml><?xml version="1.0" encoding="utf-8"?>
 <p:sld xmlns:a="http://schemas.openxmlformats.org/drawingml/2006/main" xmlns:r="http://schemas.openxmlformats.org/officeDocument/2006/relationships" xmlns:p="http://schemas.openxmlformats.org/presentationml/2006/main">
   <p:cSld>
     <p:spTree>
@@ -5013,7 +5089,7 @@
         </p:blipFill>
         <p:spPr>
           <a:xfrm>
-            <a:off x="4998085" y="84455"/>
+            <a:off x="4651375" y="0"/>
             <a:ext cx="7016750" cy="6858000"/>
           </a:xfrm>
           <a:prstGeom prst="rect">
@@ -5030,7 +5106,7 @@
         <p:spPr>
           <a:xfrm>
             <a:off x="213995" y="245110"/>
-            <a:ext cx="3020695" cy="645160"/>
+            <a:ext cx="4189730" cy="737235"/>
           </a:xfrm>
           <a:prstGeom prst="rect">
             <a:avLst/>
@@ -5043,8 +5119,8 @@
           </a:bodyPr>
           <a:p>
             <a:r>
-              <a:rPr lang="en-US" altLang="zh-CN">
-                <a:latin typeface="Times New Roman" panose="02020603050405020304" charset="0"/>
+              <a:rPr lang="en-US" altLang="zh-CN" sz="2400">
+                <a:latin typeface="微软雅黑" panose="020B0503020204020204" charset="-122"/>
                 <a:ea typeface="微软雅黑" panose="020B0503020204020204" charset="-122"/>
                 <a:cs typeface="Times New Roman" panose="02020603050405020304" charset="0"/>
                 <a:sym typeface="+mn-ea"/>
@@ -5052,7 +5128,7 @@
               <a:t>qwen_openai_style_llm.py</a:t>
             </a:r>
             <a:endParaRPr lang="en-US" altLang="zh-CN">
-              <a:latin typeface="Times New Roman" panose="02020603050405020304" charset="0"/>
+              <a:latin typeface="微软雅黑" panose="020B0503020204020204" charset="-122"/>
               <a:ea typeface="微软雅黑" panose="020B0503020204020204" charset="-122"/>
               <a:cs typeface="Times New Roman" panose="02020603050405020304" charset="0"/>
               <a:sym typeface="+mn-ea"/>
@@ -5060,7 +5136,7 @@
           </a:p>
           <a:p>
             <a:endParaRPr lang="zh-CN" altLang="en-US">
-              <a:latin typeface="Times New Roman" panose="02020603050405020304" charset="0"/>
+              <a:latin typeface="微软雅黑" panose="020B0503020204020204" charset="-122"/>
               <a:cs typeface="Times New Roman" panose="02020603050405020304" charset="0"/>
             </a:endParaRPr>
           </a:p>
@@ -5077,7 +5153,7 @@
 </p:sld>
 </file>
 
-<file path=ppt/slides/slide6.xml><?xml version="1.0" encoding="utf-8"?>
+<file path=ppt/slides/slide7.xml><?xml version="1.0" encoding="utf-8"?>
 <p:sld xmlns:a="http://schemas.openxmlformats.org/drawingml/2006/main" xmlns:r="http://schemas.openxmlformats.org/officeDocument/2006/relationships" xmlns:p="http://schemas.openxmlformats.org/presentationml/2006/main">
   <p:cSld>
     <p:spTree>
@@ -5158,7 +5234,7 @@
           <a:p>
             <a:r>
               <a:rPr lang="en-US" altLang="zh-CN" sz="2400">
-                <a:latin typeface="Times New Roman" panose="02020603050405020304" charset="0"/>
+                <a:latin typeface="微软雅黑" panose="020B0503020204020204" charset="-122"/>
                 <a:ea typeface="微软雅黑" panose="020B0503020204020204" charset="-122"/>
                 <a:cs typeface="Times New Roman" panose="02020603050405020304" charset="0"/>
                 <a:sym typeface="+mn-ea"/>
@@ -5166,7 +5242,7 @@
               <a:t>test_qwen_connection.py</a:t>
             </a:r>
             <a:endParaRPr lang="en-US" altLang="zh-CN" sz="2400">
-              <a:latin typeface="Times New Roman" panose="02020603050405020304" charset="0"/>
+              <a:latin typeface="微软雅黑" panose="020B0503020204020204" charset="-122"/>
               <a:ea typeface="微软雅黑" panose="020B0503020204020204" charset="-122"/>
               <a:cs typeface="Times New Roman" panose="02020603050405020304" charset="0"/>
               <a:sym typeface="+mn-ea"/>
@@ -6011,6 +6087,14 @@
 </file>
 
 <file path=ppt/tags/tag68.xml><?xml version="1.0" encoding="utf-8"?>
+<p:tagLst xmlns:p="http://schemas.openxmlformats.org/presentationml/2006/main">
+  <p:tag name="KSO_WM_BEAUTIFY_FLAG" val="#wm#"/>
+  <p:tag name="KSO_WM_TEMPLATE_CATEGORY" val="custom"/>
+  <p:tag name="KSO_WM_TEMPLATE_INDEX" val="20205081"/>
+</p:tagLst>
+</file>
+
+<file path=ppt/tags/tag69.xml><?xml version="1.0" encoding="utf-8"?>
 <p:tagLst xmlns:p="http://schemas.openxmlformats.org/presentationml/2006/main">
   <p:tag name="KSO_WM_BEAUTIFY_FLAG" val="#wm#"/>
   <p:tag name="KSO_WM_TEMPLATE_CATEGORY" val="custom"/>

--- a/docs/wswCR7/软工实践-11-13.pptx
+++ b/docs/wswCR7/软工实践-11-13.pptx
@@ -3087,7 +3087,7 @@
         <p:spPr>
           <a:xfrm>
             <a:off x="3558540" y="1423670"/>
-            <a:ext cx="7204710" cy="1198880"/>
+            <a:ext cx="3806825" cy="1198880"/>
           </a:xfrm>
           <a:prstGeom prst="rect">
             <a:avLst/>
@@ -3166,7 +3166,7 @@
         <p:spPr>
           <a:xfrm>
             <a:off x="3644265" y="2794000"/>
-            <a:ext cx="4723765" cy="3046095"/>
+            <a:ext cx="4428490" cy="3046095"/>
           </a:xfrm>
           <a:prstGeom prst="rect">
             <a:avLst/>
@@ -4380,7 +4380,7 @@
         </p:blipFill>
         <p:spPr>
           <a:xfrm>
-            <a:off x="231140" y="541655"/>
+            <a:off x="4914265" y="645795"/>
             <a:ext cx="6807200" cy="6212205"/>
           </a:xfrm>
           <a:prstGeom prst="rect">
@@ -4388,6 +4388,71 @@
           </a:prstGeom>
         </p:spPr>
       </p:pic>
+      <p:sp>
+        <p:nvSpPr>
+          <p:cNvPr id="2" name="文本框 1"/>
+          <p:cNvSpPr txBox="1"/>
+          <p:nvPr/>
+        </p:nvSpPr>
+        <p:spPr>
+          <a:xfrm>
+            <a:off x="315595" y="939165"/>
+            <a:ext cx="2381250" cy="1476375"/>
+          </a:xfrm>
+          <a:prstGeom prst="rect">
+            <a:avLst/>
+          </a:prstGeom>
+          <a:noFill/>
+        </p:spPr>
+        <p:txBody>
+          <a:bodyPr wrap="square" rtlCol="0">
+            <a:spAutoFit/>
+          </a:bodyPr>
+          <a:p>
+            <a:r>
+              <a:rPr lang="zh-CN" altLang="en-US"/>
+              <a:t>输入</a:t>
+            </a:r>
+            <a:r>
+              <a:rPr lang="en-US" altLang="zh-CN"/>
+              <a:t>/</a:t>
+            </a:r>
+            <a:r>
+              <a:rPr lang="zh-CN" altLang="en-US"/>
+              <a:t>输出键检查</a:t>
+            </a:r>
+            <a:endParaRPr lang="zh-CN" altLang="en-US"/>
+          </a:p>
+          <a:p>
+            <a:r>
+              <a:rPr lang="zh-CN" altLang="en-US"/>
+              <a:t>输入解析</a:t>
+            </a:r>
+            <a:endParaRPr lang="zh-CN" altLang="en-US"/>
+          </a:p>
+          <a:p>
+            <a:r>
+              <a:rPr lang="zh-CN" altLang="en-US"/>
+              <a:t>结果解析</a:t>
+            </a:r>
+            <a:endParaRPr lang="zh-CN" altLang="en-US"/>
+          </a:p>
+          <a:p>
+            <a:r>
+              <a:rPr lang="zh-CN" altLang="en-US"/>
+              <a:t>同步执行</a:t>
+            </a:r>
+            <a:endParaRPr lang="zh-CN" altLang="en-US"/>
+          </a:p>
+          <a:p>
+            <a:r>
+              <a:rPr lang="zh-CN" altLang="en-US"/>
+              <a:t>异步执行</a:t>
+            </a:r>
+            <a:endParaRPr lang="zh-CN" altLang="en-US"/>
+          </a:p>
+        </p:txBody>
+      </p:sp>
     </p:spTree>
     <p:custDataLst>
       <p:tags r:id="rId2"/>
@@ -5105,8 +5170,8 @@
         </p:nvSpPr>
         <p:spPr>
           <a:xfrm>
-            <a:off x="213995" y="245110"/>
-            <a:ext cx="4189730" cy="737235"/>
+            <a:off x="106045" y="93345"/>
+            <a:ext cx="4189730" cy="706755"/>
           </a:xfrm>
           <a:prstGeom prst="rect">
             <a:avLst/>
@@ -5119,7 +5184,7 @@
           </a:bodyPr>
           <a:p>
             <a:r>
-              <a:rPr lang="en-US" altLang="zh-CN" sz="2400">
+              <a:rPr lang="en-US" altLang="zh-CN" sz="2000">
                 <a:latin typeface="微软雅黑" panose="020B0503020204020204" charset="-122"/>
                 <a:ea typeface="微软雅黑" panose="020B0503020204020204" charset="-122"/>
                 <a:cs typeface="Times New Roman" panose="02020603050405020304" charset="0"/>
@@ -5127,7 +5192,7 @@
               </a:rPr>
               <a:t>qwen_openai_style_llm.py</a:t>
             </a:r>
-            <a:endParaRPr lang="en-US" altLang="zh-CN">
+            <a:endParaRPr lang="en-US" altLang="zh-CN" sz="2000">
               <a:latin typeface="微软雅黑" panose="020B0503020204020204" charset="-122"/>
               <a:ea typeface="微软雅黑" panose="020B0503020204020204" charset="-122"/>
               <a:cs typeface="Times New Roman" panose="02020603050405020304" charset="0"/>
@@ -5135,7 +5200,7 @@
             </a:endParaRPr>
           </a:p>
           <a:p>
-            <a:endParaRPr lang="zh-CN" altLang="en-US">
+            <a:endParaRPr lang="zh-CN" altLang="en-US" sz="2000">
               <a:latin typeface="微软雅黑" panose="020B0503020204020204" charset="-122"/>
               <a:cs typeface="Times New Roman" panose="02020603050405020304" charset="0"/>
             </a:endParaRPr>
@@ -5220,7 +5285,7 @@
         <p:spPr>
           <a:xfrm>
             <a:off x="98425" y="44450"/>
-            <a:ext cx="6096000" cy="460375"/>
+            <a:ext cx="6096000" cy="398780"/>
           </a:xfrm>
           <a:prstGeom prst="rect">
             <a:avLst/>
@@ -5233,7 +5298,7 @@
           </a:bodyPr>
           <a:p>
             <a:r>
-              <a:rPr lang="en-US" altLang="zh-CN" sz="2400">
+              <a:rPr lang="en-US" altLang="zh-CN" sz="2000">
                 <a:latin typeface="微软雅黑" panose="020B0503020204020204" charset="-122"/>
                 <a:ea typeface="微软雅黑" panose="020B0503020204020204" charset="-122"/>
                 <a:cs typeface="Times New Roman" panose="02020603050405020304" charset="0"/>
@@ -5241,7 +5306,7 @@
               </a:rPr>
               <a:t>test_qwen_connection.py</a:t>
             </a:r>
-            <a:endParaRPr lang="en-US" altLang="zh-CN" sz="2400">
+            <a:endParaRPr lang="en-US" altLang="zh-CN" sz="2000">
               <a:latin typeface="微软雅黑" panose="020B0503020204020204" charset="-122"/>
               <a:ea typeface="微软雅黑" panose="020B0503020204020204" charset="-122"/>
               <a:cs typeface="Times New Roman" panose="02020603050405020304" charset="0"/>
